--- a/game-design/sbs-game-academy/묵찌빠 플로우차트 만들기.pptx
+++ b/game-design/sbs-game-academy/묵찌빠 플로우차트 만들기.pptx
@@ -104,7 +104,665 @@
       </a:defRPr>
     </a:lvl9pPr>
   </p:defaultTextStyle>
+  <p:extLst>
+    <p:ext uri="{EFAFB233-063F-42B5-8137-9DF3F51BA10A}">
+      <p15:sldGuideLst xmlns:p15="http://schemas.microsoft.com/office/powerpoint/2012/main"/>
+    </p:ext>
+  </p:extLst>
 </p:presentation>
+</file>
+
+<file path=ppt/revisionInfo.xml><?xml version="1.0" encoding="utf-8"?>
+<p1510:revInfo xmlns:a="http://schemas.openxmlformats.org/drawingml/2006/main" xmlns:r="http://schemas.openxmlformats.org/officeDocument/2006/relationships" xmlns:p1510="http://schemas.microsoft.com/office/powerpoint/2015/10/main">
+  <p1510:revLst>
+    <p1510:client id="{CE67D866-AC49-4B7C-A427-115C26FCE4E8}" v="37" dt="2026-05-15T11:24:25.345"/>
+  </p1510:revLst>
+</p1510:revInfo>
+</file>
+
+<file path=ppt/changesInfos/changesInfo1.xml><?xml version="1.0" encoding="utf-8"?>
+<pc:chgInfo xmlns:a="http://schemas.openxmlformats.org/drawingml/2006/main" xmlns:r="http://schemas.openxmlformats.org/officeDocument/2006/relationships" xmlns:ac="http://schemas.microsoft.com/office/drawing/2013/main/command" xmlns:pc="http://schemas.microsoft.com/office/powerpoint/2013/main/command">
+  <pc:docChgLst>
+    <pc:chgData name="재우 정" userId="e3daf6144271f291" providerId="LiveId" clId="{7C0A1077-1E75-473B-AD7B-6C7C62AD3E9F}"/>
+    <pc:docChg chg="undo custSel modSld">
+      <pc:chgData name="재우 정" userId="e3daf6144271f291" providerId="LiveId" clId="{7C0A1077-1E75-473B-AD7B-6C7C62AD3E9F}" dt="2026-05-15T11:27:44.060" v="802" actId="1076"/>
+      <pc:docMkLst>
+        <pc:docMk/>
+      </pc:docMkLst>
+      <pc:sldChg chg="addSp delSp modSp mod">
+        <pc:chgData name="재우 정" userId="e3daf6144271f291" providerId="LiveId" clId="{7C0A1077-1E75-473B-AD7B-6C7C62AD3E9F}" dt="2026-05-15T11:27:44.060" v="802" actId="1076"/>
+        <pc:sldMkLst>
+          <pc:docMk/>
+          <pc:sldMk cId="3766218975" sldId="256"/>
+        </pc:sldMkLst>
+        <pc:spChg chg="mod">
+          <ac:chgData name="재우 정" userId="e3daf6144271f291" providerId="LiveId" clId="{7C0A1077-1E75-473B-AD7B-6C7C62AD3E9F}" dt="2026-05-15T10:59:52.964" v="227" actId="20577"/>
+          <ac:spMkLst>
+            <pc:docMk/>
+            <pc:sldMk cId="3766218975" sldId="256"/>
+            <ac:spMk id="4" creationId="{916A1234-3AC9-4C82-837D-E96BE02F2A2D}"/>
+          </ac:spMkLst>
+        </pc:spChg>
+        <pc:spChg chg="add del mod">
+          <ac:chgData name="재우 정" userId="e3daf6144271f291" providerId="LiveId" clId="{7C0A1077-1E75-473B-AD7B-6C7C62AD3E9F}" dt="2026-05-15T11:27:24.632" v="796" actId="478"/>
+          <ac:spMkLst>
+            <pc:docMk/>
+            <pc:sldMk cId="3766218975" sldId="256"/>
+            <ac:spMk id="22" creationId="{4B6118EA-96AB-0872-C747-D6066545589F}"/>
+          </ac:spMkLst>
+        </pc:spChg>
+        <pc:spChg chg="add mod">
+          <ac:chgData name="재우 정" userId="e3daf6144271f291" providerId="LiveId" clId="{7C0A1077-1E75-473B-AD7B-6C7C62AD3E9F}" dt="2026-05-15T11:27:44.060" v="802" actId="1076"/>
+          <ac:spMkLst>
+            <pc:docMk/>
+            <pc:sldMk cId="3766218975" sldId="256"/>
+            <ac:spMk id="33" creationId="{D89C1369-D0FD-D46B-70D5-1835AD9EF822}"/>
+          </ac:spMkLst>
+        </pc:spChg>
+        <pc:spChg chg="add del mod">
+          <ac:chgData name="재우 정" userId="e3daf6144271f291" providerId="LiveId" clId="{7C0A1077-1E75-473B-AD7B-6C7C62AD3E9F}" dt="2026-05-15T11:12:37.642" v="528" actId="478"/>
+          <ac:spMkLst>
+            <pc:docMk/>
+            <pc:sldMk cId="3766218975" sldId="256"/>
+            <ac:spMk id="48" creationId="{43BF1849-31EA-D879-979B-705E4F40F7FE}"/>
+          </ac:spMkLst>
+        </pc:spChg>
+        <pc:spChg chg="mod">
+          <ac:chgData name="재우 정" userId="e3daf6144271f291" providerId="LiveId" clId="{7C0A1077-1E75-473B-AD7B-6C7C62AD3E9F}" dt="2026-05-15T11:23:13.496" v="719" actId="1076"/>
+          <ac:spMkLst>
+            <pc:docMk/>
+            <pc:sldMk cId="3766218975" sldId="256"/>
+            <ac:spMk id="107" creationId="{AAD9A41B-97D7-4B5B-B286-BE83EB0FCDFC}"/>
+          </ac:spMkLst>
+        </pc:spChg>
+        <pc:spChg chg="mod">
+          <ac:chgData name="재우 정" userId="e3daf6144271f291" providerId="LiveId" clId="{7C0A1077-1E75-473B-AD7B-6C7C62AD3E9F}" dt="2026-05-15T10:57:02.456" v="7" actId="20577"/>
+          <ac:spMkLst>
+            <pc:docMk/>
+            <pc:sldMk cId="3766218975" sldId="256"/>
+            <ac:spMk id="370" creationId="{18FD8584-FB89-4847-8BE3-C759796DE878}"/>
+          </ac:spMkLst>
+        </pc:spChg>
+        <pc:spChg chg="mod">
+          <ac:chgData name="재우 정" userId="e3daf6144271f291" providerId="LiveId" clId="{7C0A1077-1E75-473B-AD7B-6C7C62AD3E9F}" dt="2026-05-15T11:13:17.305" v="538" actId="1076"/>
+          <ac:spMkLst>
+            <pc:docMk/>
+            <pc:sldMk cId="3766218975" sldId="256"/>
+            <ac:spMk id="377" creationId="{FBC1A2BF-FE04-4790-B171-5F58161A0BA2}"/>
+          </ac:spMkLst>
+        </pc:spChg>
+        <pc:spChg chg="mod">
+          <ac:chgData name="재우 정" userId="e3daf6144271f291" providerId="LiveId" clId="{7C0A1077-1E75-473B-AD7B-6C7C62AD3E9F}" dt="2026-05-15T11:13:22.259" v="539" actId="1076"/>
+          <ac:spMkLst>
+            <pc:docMk/>
+            <pc:sldMk cId="3766218975" sldId="256"/>
+            <ac:spMk id="388" creationId="{1BF402D2-EE6C-4DFB-B48B-B52CFF6D4079}"/>
+          </ac:spMkLst>
+        </pc:spChg>
+        <pc:spChg chg="mod">
+          <ac:chgData name="재우 정" userId="e3daf6144271f291" providerId="LiveId" clId="{7C0A1077-1E75-473B-AD7B-6C7C62AD3E9F}" dt="2026-05-15T11:15:03.436" v="570" actId="1076"/>
+          <ac:spMkLst>
+            <pc:docMk/>
+            <pc:sldMk cId="3766218975" sldId="256"/>
+            <ac:spMk id="389" creationId="{B7341EBC-6E38-4A88-9B3E-874AD706BA1F}"/>
+          </ac:spMkLst>
+        </pc:spChg>
+        <pc:spChg chg="del mod">
+          <ac:chgData name="재우 정" userId="e3daf6144271f291" providerId="LiveId" clId="{7C0A1077-1E75-473B-AD7B-6C7C62AD3E9F}" dt="2026-05-15T11:00:52.248" v="285" actId="478"/>
+          <ac:spMkLst>
+            <pc:docMk/>
+            <pc:sldMk cId="3766218975" sldId="256"/>
+            <ac:spMk id="393" creationId="{AEB3D022-75FE-4531-B31B-37839D2E27F0}"/>
+          </ac:spMkLst>
+        </pc:spChg>
+        <pc:spChg chg="del mod">
+          <ac:chgData name="재우 정" userId="e3daf6144271f291" providerId="LiveId" clId="{7C0A1077-1E75-473B-AD7B-6C7C62AD3E9F}" dt="2026-05-15T11:00:52.248" v="285" actId="478"/>
+          <ac:spMkLst>
+            <pc:docMk/>
+            <pc:sldMk cId="3766218975" sldId="256"/>
+            <ac:spMk id="399" creationId="{0C99B941-F954-4CB8-ABB7-D37ED2AA0722}"/>
+          </ac:spMkLst>
+        </pc:spChg>
+        <pc:spChg chg="mod">
+          <ac:chgData name="재우 정" userId="e3daf6144271f291" providerId="LiveId" clId="{7C0A1077-1E75-473B-AD7B-6C7C62AD3E9F}" dt="2026-05-15T11:18:00.249" v="616" actId="1076"/>
+          <ac:spMkLst>
+            <pc:docMk/>
+            <pc:sldMk cId="3766218975" sldId="256"/>
+            <ac:spMk id="407" creationId="{4AFD0173-9AF7-43E3-BD1B-170C4676FFFA}"/>
+          </ac:spMkLst>
+        </pc:spChg>
+        <pc:spChg chg="mod">
+          <ac:chgData name="재우 정" userId="e3daf6144271f291" providerId="LiveId" clId="{7C0A1077-1E75-473B-AD7B-6C7C62AD3E9F}" dt="2026-05-15T11:21:45.356" v="693" actId="1076"/>
+          <ac:spMkLst>
+            <pc:docMk/>
+            <pc:sldMk cId="3766218975" sldId="256"/>
+            <ac:spMk id="412" creationId="{A3ECACFD-F6F8-4F53-AA09-475902BBCC06}"/>
+          </ac:spMkLst>
+        </pc:spChg>
+        <pc:spChg chg="del">
+          <ac:chgData name="재우 정" userId="e3daf6144271f291" providerId="LiveId" clId="{7C0A1077-1E75-473B-AD7B-6C7C62AD3E9F}" dt="2026-05-15T11:00:52.248" v="285" actId="478"/>
+          <ac:spMkLst>
+            <pc:docMk/>
+            <pc:sldMk cId="3766218975" sldId="256"/>
+            <ac:spMk id="438" creationId="{469F43AA-E76C-49FE-894F-0EBB18EA75D1}"/>
+          </ac:spMkLst>
+        </pc:spChg>
+        <pc:spChg chg="add mod">
+          <ac:chgData name="재우 정" userId="e3daf6144271f291" providerId="LiveId" clId="{7C0A1077-1E75-473B-AD7B-6C7C62AD3E9F}" dt="2026-05-15T11:19:46.130" v="650" actId="1076"/>
+          <ac:spMkLst>
+            <pc:docMk/>
+            <pc:sldMk cId="3766218975" sldId="256"/>
+            <ac:spMk id="458" creationId="{6F023899-B0CA-4455-8636-10F3294EE5CD}"/>
+          </ac:spMkLst>
+        </pc:spChg>
+        <pc:spChg chg="add mod">
+          <ac:chgData name="재우 정" userId="e3daf6144271f291" providerId="LiveId" clId="{7C0A1077-1E75-473B-AD7B-6C7C62AD3E9F}" dt="2026-05-15T11:22:39.810" v="709" actId="1076"/>
+          <ac:spMkLst>
+            <pc:docMk/>
+            <pc:sldMk cId="3766218975" sldId="256"/>
+            <ac:spMk id="463" creationId="{873578E9-3213-9BEA-2555-1719FDC16DC7}"/>
+          </ac:spMkLst>
+        </pc:spChg>
+        <pc:spChg chg="del">
+          <ac:chgData name="재우 정" userId="e3daf6144271f291" providerId="LiveId" clId="{7C0A1077-1E75-473B-AD7B-6C7C62AD3E9F}" dt="2026-05-15T11:00:52.248" v="285" actId="478"/>
+          <ac:spMkLst>
+            <pc:docMk/>
+            <pc:sldMk cId="3766218975" sldId="256"/>
+            <ac:spMk id="464" creationId="{5443C906-8797-4566-9EA1-54968D3E668B}"/>
+          </ac:spMkLst>
+        </pc:spChg>
+        <pc:spChg chg="del mod">
+          <ac:chgData name="재우 정" userId="e3daf6144271f291" providerId="LiveId" clId="{7C0A1077-1E75-473B-AD7B-6C7C62AD3E9F}" dt="2026-05-15T11:12:38.654" v="530" actId="478"/>
+          <ac:spMkLst>
+            <pc:docMk/>
+            <pc:sldMk cId="3766218975" sldId="256"/>
+            <ac:spMk id="465" creationId="{E29D2CE0-42AE-4462-A3B6-BD2F9FEF3155}"/>
+          </ac:spMkLst>
+        </pc:spChg>
+        <pc:spChg chg="del mod">
+          <ac:chgData name="재우 정" userId="e3daf6144271f291" providerId="LiveId" clId="{7C0A1077-1E75-473B-AD7B-6C7C62AD3E9F}" dt="2026-05-15T11:22:24.919" v="706" actId="478"/>
+          <ac:spMkLst>
+            <pc:docMk/>
+            <pc:sldMk cId="3766218975" sldId="256"/>
+            <ac:spMk id="467" creationId="{5C60D09F-680A-401D-BFF4-CF00D4FBB4BE}"/>
+          </ac:spMkLst>
+        </pc:spChg>
+        <pc:spChg chg="del">
+          <ac:chgData name="재우 정" userId="e3daf6144271f291" providerId="LiveId" clId="{7C0A1077-1E75-473B-AD7B-6C7C62AD3E9F}" dt="2026-05-15T11:00:52.248" v="285" actId="478"/>
+          <ac:spMkLst>
+            <pc:docMk/>
+            <pc:sldMk cId="3766218975" sldId="256"/>
+            <ac:spMk id="468" creationId="{FC409F8D-4C04-4FAA-AC9B-0AC0E27C0383}"/>
+          </ac:spMkLst>
+        </pc:spChg>
+        <pc:spChg chg="del mod">
+          <ac:chgData name="재우 정" userId="e3daf6144271f291" providerId="LiveId" clId="{7C0A1077-1E75-473B-AD7B-6C7C62AD3E9F}" dt="2026-05-15T11:00:52.248" v="285" actId="478"/>
+          <ac:spMkLst>
+            <pc:docMk/>
+            <pc:sldMk cId="3766218975" sldId="256"/>
+            <ac:spMk id="469" creationId="{E2A60DEC-BD9A-4BA6-A55D-EE54B1FF95D2}"/>
+          </ac:spMkLst>
+        </pc:spChg>
+        <pc:spChg chg="del mod">
+          <ac:chgData name="재우 정" userId="e3daf6144271f291" providerId="LiveId" clId="{7C0A1077-1E75-473B-AD7B-6C7C62AD3E9F}" dt="2026-05-15T11:12:59.802" v="532" actId="478"/>
+          <ac:spMkLst>
+            <pc:docMk/>
+            <pc:sldMk cId="3766218975" sldId="256"/>
+            <ac:spMk id="470" creationId="{D8DF44E9-6BB2-4AD1-A1C3-E5C7ADCD763C}"/>
+          </ac:spMkLst>
+        </pc:spChg>
+        <pc:spChg chg="del mod">
+          <ac:chgData name="재우 정" userId="e3daf6144271f291" providerId="LiveId" clId="{7C0A1077-1E75-473B-AD7B-6C7C62AD3E9F}" dt="2026-05-15T11:04:54.289" v="465" actId="478"/>
+          <ac:spMkLst>
+            <pc:docMk/>
+            <pc:sldMk cId="3766218975" sldId="256"/>
+            <ac:spMk id="471" creationId="{73C41714-D187-4D3D-A74F-B8507FF4E68C}"/>
+          </ac:spMkLst>
+        </pc:spChg>
+        <pc:spChg chg="del mod">
+          <ac:chgData name="재우 정" userId="e3daf6144271f291" providerId="LiveId" clId="{7C0A1077-1E75-473B-AD7B-6C7C62AD3E9F}" dt="2026-05-15T11:14:03.288" v="547" actId="478"/>
+          <ac:spMkLst>
+            <pc:docMk/>
+            <pc:sldMk cId="3766218975" sldId="256"/>
+            <ac:spMk id="472" creationId="{7D047BAE-2FEE-4609-96FF-323B5FCDD260}"/>
+          </ac:spMkLst>
+        </pc:spChg>
+        <pc:spChg chg="del mod">
+          <ac:chgData name="재우 정" userId="e3daf6144271f291" providerId="LiveId" clId="{7C0A1077-1E75-473B-AD7B-6C7C62AD3E9F}" dt="2026-05-15T11:22:26.183" v="707" actId="478"/>
+          <ac:spMkLst>
+            <pc:docMk/>
+            <pc:sldMk cId="3766218975" sldId="256"/>
+            <ac:spMk id="473" creationId="{6A068873-BD91-4583-8E6B-166409285B76}"/>
+          </ac:spMkLst>
+        </pc:spChg>
+        <pc:spChg chg="del">
+          <ac:chgData name="재우 정" userId="e3daf6144271f291" providerId="LiveId" clId="{7C0A1077-1E75-473B-AD7B-6C7C62AD3E9F}" dt="2026-05-15T11:00:52.248" v="285" actId="478"/>
+          <ac:spMkLst>
+            <pc:docMk/>
+            <pc:sldMk cId="3766218975" sldId="256"/>
+            <ac:spMk id="474" creationId="{586457A1-70D1-4B2D-9DD1-7534C12062BD}"/>
+          </ac:spMkLst>
+        </pc:spChg>
+        <pc:spChg chg="add del mod">
+          <ac:chgData name="재우 정" userId="e3daf6144271f291" providerId="LiveId" clId="{7C0A1077-1E75-473B-AD7B-6C7C62AD3E9F}" dt="2026-05-15T11:21:11.931" v="680" actId="478"/>
+          <ac:spMkLst>
+            <pc:docMk/>
+            <pc:sldMk cId="3766218975" sldId="256"/>
+            <ac:spMk id="480" creationId="{EEF1667F-42B9-69A8-14D7-D53186ADCE78}"/>
+          </ac:spMkLst>
+        </pc:spChg>
+        <pc:spChg chg="mod">
+          <ac:chgData name="재우 정" userId="e3daf6144271f291" providerId="LiveId" clId="{7C0A1077-1E75-473B-AD7B-6C7C62AD3E9F}" dt="2026-05-15T11:27:03.013" v="768" actId="20577"/>
+          <ac:spMkLst>
+            <pc:docMk/>
+            <pc:sldMk cId="3766218975" sldId="256"/>
+            <ac:spMk id="485" creationId="{6A6EFADE-9B50-4175-8E89-B0763EFF2B03}"/>
+          </ac:spMkLst>
+        </pc:spChg>
+        <pc:spChg chg="add del mod">
+          <ac:chgData name="재우 정" userId="e3daf6144271f291" providerId="LiveId" clId="{7C0A1077-1E75-473B-AD7B-6C7C62AD3E9F}" dt="2026-05-15T11:21:09.944" v="678" actId="478"/>
+          <ac:spMkLst>
+            <pc:docMk/>
+            <pc:sldMk cId="3766218975" sldId="256"/>
+            <ac:spMk id="493" creationId="{D7B0CF0B-AEAB-156A-DB7B-EFE8C8C73676}"/>
+          </ac:spMkLst>
+        </pc:spChg>
+        <pc:spChg chg="add del mod">
+          <ac:chgData name="재우 정" userId="e3daf6144271f291" providerId="LiveId" clId="{7C0A1077-1E75-473B-AD7B-6C7C62AD3E9F}" dt="2026-05-15T11:12:36.754" v="527" actId="478"/>
+          <ac:spMkLst>
+            <pc:docMk/>
+            <pc:sldMk cId="3766218975" sldId="256"/>
+            <ac:spMk id="494" creationId="{8E3D758B-86AB-2DDD-00AC-5C94270528DE}"/>
+          </ac:spMkLst>
+        </pc:spChg>
+        <pc:spChg chg="add del mod">
+          <ac:chgData name="재우 정" userId="e3daf6144271f291" providerId="LiveId" clId="{7C0A1077-1E75-473B-AD7B-6C7C62AD3E9F}" dt="2026-05-15T11:27:08.421" v="788" actId="478"/>
+          <ac:spMkLst>
+            <pc:docMk/>
+            <pc:sldMk cId="3766218975" sldId="256"/>
+            <ac:spMk id="495" creationId="{BA2DACA4-F934-EF5F-1C38-5D3994FC59FA}"/>
+          </ac:spMkLst>
+        </pc:spChg>
+        <pc:spChg chg="add mod">
+          <ac:chgData name="재우 정" userId="e3daf6144271f291" providerId="LiveId" clId="{7C0A1077-1E75-473B-AD7B-6C7C62AD3E9F}" dt="2026-05-15T11:27:16.594" v="792" actId="1076"/>
+          <ac:spMkLst>
+            <pc:docMk/>
+            <pc:sldMk cId="3766218975" sldId="256"/>
+            <ac:spMk id="496" creationId="{DB01F2FD-6194-94DB-5B86-2B6015FAA037}"/>
+          </ac:spMkLst>
+        </pc:spChg>
+        <pc:spChg chg="del mod">
+          <ac:chgData name="재우 정" userId="e3daf6144271f291" providerId="LiveId" clId="{7C0A1077-1E75-473B-AD7B-6C7C62AD3E9F}" dt="2026-05-15T10:59:26.035" v="147" actId="478"/>
+          <ac:spMkLst>
+            <pc:docMk/>
+            <pc:sldMk cId="3766218975" sldId="256"/>
+            <ac:spMk id="515" creationId="{596ECA42-2181-43C2-AE95-23C322BD0673}"/>
+          </ac:spMkLst>
+        </pc:spChg>
+        <pc:spChg chg="add mod">
+          <ac:chgData name="재우 정" userId="e3daf6144271f291" providerId="LiveId" clId="{7C0A1077-1E75-473B-AD7B-6C7C62AD3E9F}" dt="2026-05-15T11:18:53.221" v="631" actId="1076"/>
+          <ac:spMkLst>
+            <pc:docMk/>
+            <pc:sldMk cId="3766218975" sldId="256"/>
+            <ac:spMk id="537" creationId="{8528470A-5993-62DF-015F-92346AA9D372}"/>
+          </ac:spMkLst>
+        </pc:spChg>
+        <pc:spChg chg="add mod">
+          <ac:chgData name="재우 정" userId="e3daf6144271f291" providerId="LiveId" clId="{7C0A1077-1E75-473B-AD7B-6C7C62AD3E9F}" dt="2026-05-15T11:27:07.436" v="787" actId="20577"/>
+          <ac:spMkLst>
+            <pc:docMk/>
+            <pc:sldMk cId="3766218975" sldId="256"/>
+            <ac:spMk id="548" creationId="{C6FDDAF7-22C1-38D1-F6F3-45A3E42409C7}"/>
+          </ac:spMkLst>
+        </pc:spChg>
+        <pc:cxnChg chg="add del mod">
+          <ac:chgData name="재우 정" userId="e3daf6144271f291" providerId="LiveId" clId="{7C0A1077-1E75-473B-AD7B-6C7C62AD3E9F}" dt="2026-05-15T11:14:30.568" v="554" actId="478"/>
+          <ac:cxnSpMkLst>
+            <pc:docMk/>
+            <pc:sldMk cId="3766218975" sldId="256"/>
+            <ac:cxnSpMk id="36" creationId="{25151D35-EB9A-BCBA-373A-BD6F616D1D14}"/>
+          </ac:cxnSpMkLst>
+        </pc:cxnChg>
+        <pc:cxnChg chg="del">
+          <ac:chgData name="재우 정" userId="e3daf6144271f291" providerId="LiveId" clId="{7C0A1077-1E75-473B-AD7B-6C7C62AD3E9F}" dt="2026-05-15T11:00:52.911" v="286" actId="478"/>
+          <ac:cxnSpMkLst>
+            <pc:docMk/>
+            <pc:sldMk cId="3766218975" sldId="256"/>
+            <ac:cxnSpMk id="50" creationId="{F4073E16-029C-4A4D-90E2-11DC872EC736}"/>
+          </ac:cxnSpMkLst>
+        </pc:cxnChg>
+        <pc:cxnChg chg="mod">
+          <ac:chgData name="재우 정" userId="e3daf6144271f291" providerId="LiveId" clId="{7C0A1077-1E75-473B-AD7B-6C7C62AD3E9F}" dt="2026-05-15T10:57:35.314" v="11" actId="14100"/>
+          <ac:cxnSpMkLst>
+            <pc:docMk/>
+            <pc:sldMk cId="3766218975" sldId="256"/>
+            <ac:cxnSpMk id="51" creationId="{3B8C7EFE-AF5F-41FF-8713-3551F97BB55D}"/>
+          </ac:cxnSpMkLst>
+        </pc:cxnChg>
+        <pc:cxnChg chg="add mod">
+          <ac:chgData name="재우 정" userId="e3daf6144271f291" providerId="LiveId" clId="{7C0A1077-1E75-473B-AD7B-6C7C62AD3E9F}" dt="2026-05-15T11:17:12.252" v="599" actId="14100"/>
+          <ac:cxnSpMkLst>
+            <pc:docMk/>
+            <pc:sldMk cId="3766218975" sldId="256"/>
+            <ac:cxnSpMk id="111" creationId="{1E269488-C299-8B1E-41F7-727441AD70A3}"/>
+          </ac:cxnSpMkLst>
+        </pc:cxnChg>
+        <pc:cxnChg chg="add mod">
+          <ac:chgData name="재우 정" userId="e3daf6144271f291" providerId="LiveId" clId="{7C0A1077-1E75-473B-AD7B-6C7C62AD3E9F}" dt="2026-05-15T11:21:45.356" v="693" actId="1076"/>
+          <ac:cxnSpMkLst>
+            <pc:docMk/>
+            <pc:sldMk cId="3766218975" sldId="256"/>
+            <ac:cxnSpMk id="122" creationId="{0412E512-C27B-DD25-646A-DE05D33E4106}"/>
+          </ac:cxnSpMkLst>
+        </pc:cxnChg>
+        <pc:cxnChg chg="add mod">
+          <ac:chgData name="재우 정" userId="e3daf6144271f291" providerId="LiveId" clId="{7C0A1077-1E75-473B-AD7B-6C7C62AD3E9F}" dt="2026-05-15T11:18:00.249" v="616" actId="1076"/>
+          <ac:cxnSpMkLst>
+            <pc:docMk/>
+            <pc:sldMk cId="3766218975" sldId="256"/>
+            <ac:cxnSpMk id="126" creationId="{DB7EB2C8-0B7A-2C09-3754-68D0E823127E}"/>
+          </ac:cxnSpMkLst>
+        </pc:cxnChg>
+        <pc:cxnChg chg="add mod">
+          <ac:chgData name="재우 정" userId="e3daf6144271f291" providerId="LiveId" clId="{7C0A1077-1E75-473B-AD7B-6C7C62AD3E9F}" dt="2026-05-15T11:23:09.531" v="718" actId="14100"/>
+          <ac:cxnSpMkLst>
+            <pc:docMk/>
+            <pc:sldMk cId="3766218975" sldId="256"/>
+            <ac:cxnSpMk id="328" creationId="{E97C8AEF-A1BE-2ED9-9580-98B657F7B7DE}"/>
+          </ac:cxnSpMkLst>
+        </pc:cxnChg>
+        <pc:cxnChg chg="add mod">
+          <ac:chgData name="재우 정" userId="e3daf6144271f291" providerId="LiveId" clId="{7C0A1077-1E75-473B-AD7B-6C7C62AD3E9F}" dt="2026-05-15T11:22:59.879" v="716" actId="14100"/>
+          <ac:cxnSpMkLst>
+            <pc:docMk/>
+            <pc:sldMk cId="3766218975" sldId="256"/>
+            <ac:cxnSpMk id="335" creationId="{1AC720D1-7F16-D601-3C5E-8C688865E495}"/>
+          </ac:cxnSpMkLst>
+        </pc:cxnChg>
+        <pc:cxnChg chg="add mod">
+          <ac:chgData name="재우 정" userId="e3daf6144271f291" providerId="LiveId" clId="{7C0A1077-1E75-473B-AD7B-6C7C62AD3E9F}" dt="2026-05-15T11:23:22.912" v="722" actId="14100"/>
+          <ac:cxnSpMkLst>
+            <pc:docMk/>
+            <pc:sldMk cId="3766218975" sldId="256"/>
+            <ac:cxnSpMk id="340" creationId="{9DF9247E-5EC9-D754-A0F4-2A4C412480F5}"/>
+          </ac:cxnSpMkLst>
+        </pc:cxnChg>
+        <pc:cxnChg chg="add del mod">
+          <ac:chgData name="재우 정" userId="e3daf6144271f291" providerId="LiveId" clId="{7C0A1077-1E75-473B-AD7B-6C7C62AD3E9F}" dt="2026-05-15T11:24:10.496" v="740" actId="478"/>
+          <ac:cxnSpMkLst>
+            <pc:docMk/>
+            <pc:sldMk cId="3766218975" sldId="256"/>
+            <ac:cxnSpMk id="343" creationId="{F374C97F-C6BC-9437-DFE5-EAF1EA28D107}"/>
+          </ac:cxnSpMkLst>
+        </pc:cxnChg>
+        <pc:cxnChg chg="add del mod">
+          <ac:chgData name="재우 정" userId="e3daf6144271f291" providerId="LiveId" clId="{7C0A1077-1E75-473B-AD7B-6C7C62AD3E9F}" dt="2026-05-15T11:24:24.321" v="742" actId="11529"/>
+          <ac:cxnSpMkLst>
+            <pc:docMk/>
+            <pc:sldMk cId="3766218975" sldId="256"/>
+            <ac:cxnSpMk id="355" creationId="{F311F069-612A-63DC-2401-FF693EFF9628}"/>
+          </ac:cxnSpMkLst>
+        </pc:cxnChg>
+        <pc:cxnChg chg="add mod">
+          <ac:chgData name="재우 정" userId="e3daf6144271f291" providerId="LiveId" clId="{7C0A1077-1E75-473B-AD7B-6C7C62AD3E9F}" dt="2026-05-15T11:25:06.055" v="754" actId="14100"/>
+          <ac:cxnSpMkLst>
+            <pc:docMk/>
+            <pc:sldMk cId="3766218975" sldId="256"/>
+            <ac:cxnSpMk id="356" creationId="{1813DC77-9853-F945-C350-67798E88B31F}"/>
+          </ac:cxnSpMkLst>
+        </pc:cxnChg>
+        <pc:cxnChg chg="del mod">
+          <ac:chgData name="재우 정" userId="e3daf6144271f291" providerId="LiveId" clId="{7C0A1077-1E75-473B-AD7B-6C7C62AD3E9F}" dt="2026-05-15T11:00:52.248" v="285" actId="478"/>
+          <ac:cxnSpMkLst>
+            <pc:docMk/>
+            <pc:sldMk cId="3766218975" sldId="256"/>
+            <ac:cxnSpMk id="380" creationId="{7BC9028D-F1FA-4D30-A29A-C64163F48BC6}"/>
+          </ac:cxnSpMkLst>
+        </pc:cxnChg>
+        <pc:cxnChg chg="mod">
+          <ac:chgData name="재우 정" userId="e3daf6144271f291" providerId="LiveId" clId="{7C0A1077-1E75-473B-AD7B-6C7C62AD3E9F}" dt="2026-05-15T11:13:17.305" v="538" actId="1076"/>
+          <ac:cxnSpMkLst>
+            <pc:docMk/>
+            <pc:sldMk cId="3766218975" sldId="256"/>
+            <ac:cxnSpMk id="381" creationId="{CB50C371-DB5B-4D4A-8072-3614808E66C2}"/>
+          </ac:cxnSpMkLst>
+        </pc:cxnChg>
+        <pc:cxnChg chg="del mod">
+          <ac:chgData name="재우 정" userId="e3daf6144271f291" providerId="LiveId" clId="{7C0A1077-1E75-473B-AD7B-6C7C62AD3E9F}" dt="2026-05-15T10:58:04.696" v="18" actId="478"/>
+          <ac:cxnSpMkLst>
+            <pc:docMk/>
+            <pc:sldMk cId="3766218975" sldId="256"/>
+            <ac:cxnSpMk id="384" creationId="{4180C53F-5964-45DF-998B-95CDEE300535}"/>
+          </ac:cxnSpMkLst>
+        </pc:cxnChg>
+        <pc:cxnChg chg="mod">
+          <ac:chgData name="재우 정" userId="e3daf6144271f291" providerId="LiveId" clId="{7C0A1077-1E75-473B-AD7B-6C7C62AD3E9F}" dt="2026-05-15T11:13:22.259" v="539" actId="1076"/>
+          <ac:cxnSpMkLst>
+            <pc:docMk/>
+            <pc:sldMk cId="3766218975" sldId="256"/>
+            <ac:cxnSpMk id="387" creationId="{A2EAA474-CF64-4E72-A409-B8C448A400E7}"/>
+          </ac:cxnSpMkLst>
+        </pc:cxnChg>
+        <pc:cxnChg chg="del mod">
+          <ac:chgData name="재우 정" userId="e3daf6144271f291" providerId="LiveId" clId="{7C0A1077-1E75-473B-AD7B-6C7C62AD3E9F}" dt="2026-05-15T11:14:31.264" v="555" actId="478"/>
+          <ac:cxnSpMkLst>
+            <pc:docMk/>
+            <pc:sldMk cId="3766218975" sldId="256"/>
+            <ac:cxnSpMk id="390" creationId="{4E90533E-35F7-4852-A3BE-61C4E69E3DE8}"/>
+          </ac:cxnSpMkLst>
+        </pc:cxnChg>
+        <pc:cxnChg chg="del mod">
+          <ac:chgData name="재우 정" userId="e3daf6144271f291" providerId="LiveId" clId="{7C0A1077-1E75-473B-AD7B-6C7C62AD3E9F}" dt="2026-05-15T11:00:52.248" v="285" actId="478"/>
+          <ac:cxnSpMkLst>
+            <pc:docMk/>
+            <pc:sldMk cId="3766218975" sldId="256"/>
+            <ac:cxnSpMk id="396" creationId="{E75E7472-AC18-4323-BC06-E2F8D7B4A441}"/>
+          </ac:cxnSpMkLst>
+        </pc:cxnChg>
+        <pc:cxnChg chg="mod">
+          <ac:chgData name="재우 정" userId="e3daf6144271f291" providerId="LiveId" clId="{7C0A1077-1E75-473B-AD7B-6C7C62AD3E9F}" dt="2026-05-15T11:15:03.436" v="570" actId="1076"/>
+          <ac:cxnSpMkLst>
+            <pc:docMk/>
+            <pc:sldMk cId="3766218975" sldId="256"/>
+            <ac:cxnSpMk id="402" creationId="{66CECBA9-4D9C-48A2-8366-4EE6E7639CA3}"/>
+          </ac:cxnSpMkLst>
+        </pc:cxnChg>
+        <pc:cxnChg chg="del mod">
+          <ac:chgData name="재우 정" userId="e3daf6144271f291" providerId="LiveId" clId="{7C0A1077-1E75-473B-AD7B-6C7C62AD3E9F}" dt="2026-05-15T11:12:32.066" v="521" actId="478"/>
+          <ac:cxnSpMkLst>
+            <pc:docMk/>
+            <pc:sldMk cId="3766218975" sldId="256"/>
+            <ac:cxnSpMk id="413" creationId="{8BB179E8-F79A-43A4-9446-4869265E6290}"/>
+          </ac:cxnSpMkLst>
+        </pc:cxnChg>
+        <pc:cxnChg chg="del mod">
+          <ac:chgData name="재우 정" userId="e3daf6144271f291" providerId="LiveId" clId="{7C0A1077-1E75-473B-AD7B-6C7C62AD3E9F}" dt="2026-05-15T11:14:37.952" v="560" actId="478"/>
+          <ac:cxnSpMkLst>
+            <pc:docMk/>
+            <pc:sldMk cId="3766218975" sldId="256"/>
+            <ac:cxnSpMk id="415" creationId="{06E8F56F-7A72-45F2-8BD7-E492F9429885}"/>
+          </ac:cxnSpMkLst>
+        </pc:cxnChg>
+        <pc:cxnChg chg="add del mod">
+          <ac:chgData name="재우 정" userId="e3daf6144271f291" providerId="LiveId" clId="{7C0A1077-1E75-473B-AD7B-6C7C62AD3E9F}" dt="2026-05-15T11:16:05.927" v="585" actId="478"/>
+          <ac:cxnSpMkLst>
+            <pc:docMk/>
+            <pc:sldMk cId="3766218975" sldId="256"/>
+            <ac:cxnSpMk id="452" creationId="{2855B751-593F-8482-9A2A-1322AA826603}"/>
+          </ac:cxnSpMkLst>
+        </pc:cxnChg>
+        <pc:cxnChg chg="del mod">
+          <ac:chgData name="재우 정" userId="e3daf6144271f291" providerId="LiveId" clId="{7C0A1077-1E75-473B-AD7B-6C7C62AD3E9F}" dt="2026-05-15T11:00:53.474" v="287" actId="478"/>
+          <ac:cxnSpMkLst>
+            <pc:docMk/>
+            <pc:sldMk cId="3766218975" sldId="256"/>
+            <ac:cxnSpMk id="453" creationId="{0683745D-2A9A-4FDC-AE28-85A05CF563C9}"/>
+          </ac:cxnSpMkLst>
+        </pc:cxnChg>
+        <pc:cxnChg chg="del mod">
+          <ac:chgData name="재우 정" userId="e3daf6144271f291" providerId="LiveId" clId="{7C0A1077-1E75-473B-AD7B-6C7C62AD3E9F}" dt="2026-05-15T11:27:25.558" v="797" actId="478"/>
+          <ac:cxnSpMkLst>
+            <pc:docMk/>
+            <pc:sldMk cId="3766218975" sldId="256"/>
+            <ac:cxnSpMk id="457" creationId="{E132BD78-3A34-4C08-AE86-395A7859B69D}"/>
+          </ac:cxnSpMkLst>
+        </pc:cxnChg>
+        <pc:cxnChg chg="add del mod">
+          <ac:chgData name="재우 정" userId="e3daf6144271f291" providerId="LiveId" clId="{7C0A1077-1E75-473B-AD7B-6C7C62AD3E9F}" dt="2026-05-15T11:12:32.515" v="522" actId="478"/>
+          <ac:cxnSpMkLst>
+            <pc:docMk/>
+            <pc:sldMk cId="3766218975" sldId="256"/>
+            <ac:cxnSpMk id="460" creationId="{35233265-DD01-CB78-1D04-1FDE70EED07E}"/>
+          </ac:cxnSpMkLst>
+        </pc:cxnChg>
+        <pc:cxnChg chg="add del mod">
+          <ac:chgData name="재우 정" userId="e3daf6144271f291" providerId="LiveId" clId="{7C0A1077-1E75-473B-AD7B-6C7C62AD3E9F}" dt="2026-05-15T11:20:56.642" v="667" actId="478"/>
+          <ac:cxnSpMkLst>
+            <pc:docMk/>
+            <pc:sldMk cId="3766218975" sldId="256"/>
+            <ac:cxnSpMk id="466" creationId="{44BEECFA-E344-1B56-E4E9-9E8D91020E90}"/>
+          </ac:cxnSpMkLst>
+        </pc:cxnChg>
+        <pc:cxnChg chg="del mod">
+          <ac:chgData name="재우 정" userId="e3daf6144271f291" providerId="LiveId" clId="{7C0A1077-1E75-473B-AD7B-6C7C62AD3E9F}" dt="2026-05-15T11:14:50.471" v="565" actId="478"/>
+          <ac:cxnSpMkLst>
+            <pc:docMk/>
+            <pc:sldMk cId="3766218975" sldId="256"/>
+            <ac:cxnSpMk id="475" creationId="{3897E852-D424-4D7E-834E-791546575837}"/>
+          </ac:cxnSpMkLst>
+        </pc:cxnChg>
+        <pc:cxnChg chg="add del mod">
+          <ac:chgData name="재우 정" userId="e3daf6144271f291" providerId="LiveId" clId="{7C0A1077-1E75-473B-AD7B-6C7C62AD3E9F}" dt="2026-05-15T11:12:33.292" v="523" actId="478"/>
+          <ac:cxnSpMkLst>
+            <pc:docMk/>
+            <pc:sldMk cId="3766218975" sldId="256"/>
+            <ac:cxnSpMk id="481" creationId="{4EE16644-DDB5-4365-7739-417A6C37B815}"/>
+          </ac:cxnSpMkLst>
+        </pc:cxnChg>
+        <pc:cxnChg chg="add del mod">
+          <ac:chgData name="재우 정" userId="e3daf6144271f291" providerId="LiveId" clId="{7C0A1077-1E75-473B-AD7B-6C7C62AD3E9F}" dt="2026-05-15T11:12:34.386" v="524" actId="478"/>
+          <ac:cxnSpMkLst>
+            <pc:docMk/>
+            <pc:sldMk cId="3766218975" sldId="256"/>
+            <ac:cxnSpMk id="484" creationId="{30634A18-373F-8EBE-667C-D98F76582AEA}"/>
+          </ac:cxnSpMkLst>
+        </pc:cxnChg>
+        <pc:cxnChg chg="del mod">
+          <ac:chgData name="재우 정" userId="e3daf6144271f291" providerId="LiveId" clId="{7C0A1077-1E75-473B-AD7B-6C7C62AD3E9F}" dt="2026-05-15T10:57:17.010" v="8" actId="478"/>
+          <ac:cxnSpMkLst>
+            <pc:docMk/>
+            <pc:sldMk cId="3766218975" sldId="256"/>
+            <ac:cxnSpMk id="488" creationId="{C696184F-8940-45FD-A71F-577D1A917493}"/>
+          </ac:cxnSpMkLst>
+        </pc:cxnChg>
+        <pc:cxnChg chg="add del mod">
+          <ac:chgData name="재우 정" userId="e3daf6144271f291" providerId="LiveId" clId="{7C0A1077-1E75-473B-AD7B-6C7C62AD3E9F}" dt="2026-05-15T11:21:08.315" v="676" actId="478"/>
+          <ac:cxnSpMkLst>
+            <pc:docMk/>
+            <pc:sldMk cId="3766218975" sldId="256"/>
+            <ac:cxnSpMk id="489" creationId="{A3E352CE-C0D7-D1FB-C21E-5E9CC4BC94DE}"/>
+          </ac:cxnSpMkLst>
+        </pc:cxnChg>
+        <pc:cxnChg chg="del mod">
+          <ac:chgData name="재우 정" userId="e3daf6144271f291" providerId="LiveId" clId="{7C0A1077-1E75-473B-AD7B-6C7C62AD3E9F}" dt="2026-05-15T10:59:24.640" v="146" actId="478"/>
+          <ac:cxnSpMkLst>
+            <pc:docMk/>
+            <pc:sldMk cId="3766218975" sldId="256"/>
+            <ac:cxnSpMk id="498" creationId="{ECB3ADCB-6697-4CAA-AB7E-F3A2E780B10D}"/>
+          </ac:cxnSpMkLst>
+        </pc:cxnChg>
+        <pc:cxnChg chg="add mod">
+          <ac:chgData name="재우 정" userId="e3daf6144271f291" providerId="LiveId" clId="{7C0A1077-1E75-473B-AD7B-6C7C62AD3E9F}" dt="2026-05-15T11:27:44.060" v="802" actId="1076"/>
+          <ac:cxnSpMkLst>
+            <pc:docMk/>
+            <pc:sldMk cId="3766218975" sldId="256"/>
+            <ac:cxnSpMk id="516" creationId="{179D012B-134F-F1F8-5003-7FE8A6AE82A6}"/>
+          </ac:cxnSpMkLst>
+        </pc:cxnChg>
+        <pc:cxnChg chg="add mod">
+          <ac:chgData name="재우 정" userId="e3daf6144271f291" providerId="LiveId" clId="{7C0A1077-1E75-473B-AD7B-6C7C62AD3E9F}" dt="2026-05-15T11:27:44.060" v="802" actId="1076"/>
+          <ac:cxnSpMkLst>
+            <pc:docMk/>
+            <pc:sldMk cId="3766218975" sldId="256"/>
+            <ac:cxnSpMk id="519" creationId="{CC0D4953-5F4E-833E-4CAB-7CE98B2E7D74}"/>
+          </ac:cxnSpMkLst>
+        </pc:cxnChg>
+        <pc:cxnChg chg="add mod">
+          <ac:chgData name="재우 정" userId="e3daf6144271f291" providerId="LiveId" clId="{7C0A1077-1E75-473B-AD7B-6C7C62AD3E9F}" dt="2026-05-15T11:18:26.308" v="622" actId="33986"/>
+          <ac:cxnSpMkLst>
+            <pc:docMk/>
+            <pc:sldMk cId="3766218975" sldId="256"/>
+            <ac:cxnSpMk id="527" creationId="{3C2310D6-DB7A-26AD-7E3E-2F1E427F1E7D}"/>
+          </ac:cxnSpMkLst>
+        </pc:cxnChg>
+        <pc:cxnChg chg="add mod">
+          <ac:chgData name="재우 정" userId="e3daf6144271f291" providerId="LiveId" clId="{7C0A1077-1E75-473B-AD7B-6C7C62AD3E9F}" dt="2026-05-15T11:27:18.484" v="793" actId="14100"/>
+          <ac:cxnSpMkLst>
+            <pc:docMk/>
+            <pc:sldMk cId="3766218975" sldId="256"/>
+            <ac:cxnSpMk id="530" creationId="{2B94D3CA-EFD6-9FCB-701F-FF20E43AA920}"/>
+          </ac:cxnSpMkLst>
+        </pc:cxnChg>
+        <pc:cxnChg chg="add del mod">
+          <ac:chgData name="재우 정" userId="e3daf6144271f291" providerId="LiveId" clId="{7C0A1077-1E75-473B-AD7B-6C7C62AD3E9F}" dt="2026-05-15T11:27:10.197" v="789" actId="478"/>
+          <ac:cxnSpMkLst>
+            <pc:docMk/>
+            <pc:sldMk cId="3766218975" sldId="256"/>
+            <ac:cxnSpMk id="533" creationId="{E53881A6-C57B-382E-FC5E-280F050E31A7}"/>
+          </ac:cxnSpMkLst>
+        </pc:cxnChg>
+        <pc:cxnChg chg="add mod">
+          <ac:chgData name="재우 정" userId="e3daf6144271f291" providerId="LiveId" clId="{7C0A1077-1E75-473B-AD7B-6C7C62AD3E9F}" dt="2026-05-15T11:27:23.226" v="795" actId="33986"/>
+          <ac:cxnSpMkLst>
+            <pc:docMk/>
+            <pc:sldMk cId="3766218975" sldId="256"/>
+            <ac:cxnSpMk id="538" creationId="{7F8E3464-A606-D043-E58F-B8346C89E82F}"/>
+          </ac:cxnSpMkLst>
+        </pc:cxnChg>
+        <pc:cxnChg chg="add mod">
+          <ac:chgData name="재우 정" userId="e3daf6144271f291" providerId="LiveId" clId="{7C0A1077-1E75-473B-AD7B-6C7C62AD3E9F}" dt="2026-05-15T11:19:49.616" v="651" actId="33986"/>
+          <ac:cxnSpMkLst>
+            <pc:docMk/>
+            <pc:sldMk cId="3766218975" sldId="256"/>
+            <ac:cxnSpMk id="541" creationId="{38C68FA7-59BB-1BAF-601F-4B8EABF3A647}"/>
+          </ac:cxnSpMkLst>
+        </pc:cxnChg>
+        <pc:cxnChg chg="add mod">
+          <ac:chgData name="재우 정" userId="e3daf6144271f291" providerId="LiveId" clId="{7C0A1077-1E75-473B-AD7B-6C7C62AD3E9F}" dt="2026-05-15T11:19:52.053" v="652" actId="1076"/>
+          <ac:cxnSpMkLst>
+            <pc:docMk/>
+            <pc:sldMk cId="3766218975" sldId="256"/>
+            <ac:cxnSpMk id="545" creationId="{5BEB7373-9AF1-35B1-8AF0-355DCA65B3A1}"/>
+          </ac:cxnSpMkLst>
+        </pc:cxnChg>
+        <pc:cxnChg chg="add mod">
+          <ac:chgData name="재우 정" userId="e3daf6144271f291" providerId="LiveId" clId="{7C0A1077-1E75-473B-AD7B-6C7C62AD3E9F}" dt="2026-05-15T11:20:10.517" v="656" actId="14100"/>
+          <ac:cxnSpMkLst>
+            <pc:docMk/>
+            <pc:sldMk cId="3766218975" sldId="256"/>
+            <ac:cxnSpMk id="554" creationId="{DE351F97-8855-AF6D-FE35-7E73CF3F1B32}"/>
+          </ac:cxnSpMkLst>
+        </pc:cxnChg>
+        <pc:cxnChg chg="add mod">
+          <ac:chgData name="재우 정" userId="e3daf6144271f291" providerId="LiveId" clId="{7C0A1077-1E75-473B-AD7B-6C7C62AD3E9F}" dt="2026-05-15T11:20:20.234" v="660" actId="14100"/>
+          <ac:cxnSpMkLst>
+            <pc:docMk/>
+            <pc:sldMk cId="3766218975" sldId="256"/>
+            <ac:cxnSpMk id="558" creationId="{9B685FEC-BE1C-9C3B-C6EF-505D1BA861D0}"/>
+          </ac:cxnSpMkLst>
+        </pc:cxnChg>
+        <pc:cxnChg chg="add del mod">
+          <ac:chgData name="재우 정" userId="e3daf6144271f291" providerId="LiveId" clId="{7C0A1077-1E75-473B-AD7B-6C7C62AD3E9F}" dt="2026-05-15T11:21:38.945" v="690" actId="478"/>
+          <ac:cxnSpMkLst>
+            <pc:docMk/>
+            <pc:sldMk cId="3766218975" sldId="256"/>
+            <ac:cxnSpMk id="575" creationId="{9A099C60-4939-EFA6-6D0B-1C4C8D8BD7E3}"/>
+          </ac:cxnSpMkLst>
+        </pc:cxnChg>
+      </pc:sldChg>
+    </pc:docChg>
+  </pc:docChgLst>
+</pc:chgInfo>
 </file>
 
 <file path=ppt/slideLayouts/slideLayout1.xml><?xml version="1.0" encoding="utf-8"?>
@@ -254,7 +912,7 @@
           <a:p>
             <a:fld id="{68D9F3A7-04AE-40E8-B909-D2F692226033}" type="datetimeFigureOut">
               <a:rPr lang="ko-KR" altLang="en-US" smtClean="0"/>
-              <a:t>2026-05-14</a:t>
+              <a:t>2026-05-15</a:t>
             </a:fld>
             <a:endParaRPr lang="ko-KR" altLang="en-US"/>
           </a:p>
@@ -452,7 +1110,7 @@
           <a:p>
             <a:fld id="{68D9F3A7-04AE-40E8-B909-D2F692226033}" type="datetimeFigureOut">
               <a:rPr lang="ko-KR" altLang="en-US" smtClean="0"/>
-              <a:t>2026-05-14</a:t>
+              <a:t>2026-05-15</a:t>
             </a:fld>
             <a:endParaRPr lang="ko-KR" altLang="en-US"/>
           </a:p>
@@ -660,7 +1318,7 @@
           <a:p>
             <a:fld id="{68D9F3A7-04AE-40E8-B909-D2F692226033}" type="datetimeFigureOut">
               <a:rPr lang="ko-KR" altLang="en-US" smtClean="0"/>
-              <a:t>2026-05-14</a:t>
+              <a:t>2026-05-15</a:t>
             </a:fld>
             <a:endParaRPr lang="ko-KR" altLang="en-US"/>
           </a:p>
@@ -858,7 +1516,7 @@
           <a:p>
             <a:fld id="{68D9F3A7-04AE-40E8-B909-D2F692226033}" type="datetimeFigureOut">
               <a:rPr lang="ko-KR" altLang="en-US" smtClean="0"/>
-              <a:t>2026-05-14</a:t>
+              <a:t>2026-05-15</a:t>
             </a:fld>
             <a:endParaRPr lang="ko-KR" altLang="en-US"/>
           </a:p>
@@ -1133,7 +1791,7 @@
           <a:p>
             <a:fld id="{68D9F3A7-04AE-40E8-B909-D2F692226033}" type="datetimeFigureOut">
               <a:rPr lang="ko-KR" altLang="en-US" smtClean="0"/>
-              <a:t>2026-05-14</a:t>
+              <a:t>2026-05-15</a:t>
             </a:fld>
             <a:endParaRPr lang="ko-KR" altLang="en-US"/>
           </a:p>
@@ -1398,7 +2056,7 @@
           <a:p>
             <a:fld id="{68D9F3A7-04AE-40E8-B909-D2F692226033}" type="datetimeFigureOut">
               <a:rPr lang="ko-KR" altLang="en-US" smtClean="0"/>
-              <a:t>2026-05-14</a:t>
+              <a:t>2026-05-15</a:t>
             </a:fld>
             <a:endParaRPr lang="ko-KR" altLang="en-US"/>
           </a:p>
@@ -1810,7 +2468,7 @@
           <a:p>
             <a:fld id="{68D9F3A7-04AE-40E8-B909-D2F692226033}" type="datetimeFigureOut">
               <a:rPr lang="ko-KR" altLang="en-US" smtClean="0"/>
-              <a:t>2026-05-14</a:t>
+              <a:t>2026-05-15</a:t>
             </a:fld>
             <a:endParaRPr lang="ko-KR" altLang="en-US"/>
           </a:p>
@@ -1951,7 +2609,7 @@
           <a:p>
             <a:fld id="{68D9F3A7-04AE-40E8-B909-D2F692226033}" type="datetimeFigureOut">
               <a:rPr lang="ko-KR" altLang="en-US" smtClean="0"/>
-              <a:t>2026-05-14</a:t>
+              <a:t>2026-05-15</a:t>
             </a:fld>
             <a:endParaRPr lang="ko-KR" altLang="en-US"/>
           </a:p>
@@ -2064,7 +2722,7 @@
           <a:p>
             <a:fld id="{68D9F3A7-04AE-40E8-B909-D2F692226033}" type="datetimeFigureOut">
               <a:rPr lang="ko-KR" altLang="en-US" smtClean="0"/>
-              <a:t>2026-05-14</a:t>
+              <a:t>2026-05-15</a:t>
             </a:fld>
             <a:endParaRPr lang="ko-KR" altLang="en-US"/>
           </a:p>
@@ -2375,7 +3033,7 @@
           <a:p>
             <a:fld id="{68D9F3A7-04AE-40E8-B909-D2F692226033}" type="datetimeFigureOut">
               <a:rPr lang="ko-KR" altLang="en-US" smtClean="0"/>
-              <a:t>2026-05-14</a:t>
+              <a:t>2026-05-15</a:t>
             </a:fld>
             <a:endParaRPr lang="ko-KR" altLang="en-US"/>
           </a:p>
@@ -2663,7 +3321,7 @@
           <a:p>
             <a:fld id="{68D9F3A7-04AE-40E8-B909-D2F692226033}" type="datetimeFigureOut">
               <a:rPr lang="ko-KR" altLang="en-US" smtClean="0"/>
-              <a:t>2026-05-14</a:t>
+              <a:t>2026-05-15</a:t>
             </a:fld>
             <a:endParaRPr lang="ko-KR" altLang="en-US"/>
           </a:p>
@@ -2904,7 +3562,7 @@
           <a:p>
             <a:fld id="{68D9F3A7-04AE-40E8-B909-D2F692226033}" type="datetimeFigureOut">
               <a:rPr lang="ko-KR" altLang="en-US" smtClean="0"/>
-              <a:t>2026-05-14</a:t>
+              <a:t>2026-05-15</a:t>
             </a:fld>
             <a:endParaRPr lang="ko-KR" altLang="en-US"/>
           </a:p>
@@ -3401,7 +4059,7 @@
                   <a:srgbClr val="FFC000"/>
                 </a:solidFill>
               </a:rPr>
-              <a:t>보를 낸다</a:t>
+              <a:t>보를 한다</a:t>
             </a:r>
             <a:r>
               <a:rPr lang="en-US" altLang="ko-KR" sz="1000" b="1" dirty="0">
@@ -3560,75 +4218,30 @@
       </p:cxnSp>
       <p:cxnSp>
         <p:nvCxnSpPr>
-          <p:cNvPr id="50" name="직선 화살표 연결선 49">
-            <a:extLst>
-              <a:ext uri="{FF2B5EF4-FFF2-40B4-BE49-F238E27FC236}">
-                <a16:creationId xmlns:a16="http://schemas.microsoft.com/office/drawing/2014/main" id="{F4073E16-029C-4A4D-90E2-11DC872EC736}"/>
+          <p:cNvPr id="51" name="직선 화살표 연결선 50">
+            <a:extLst>
+              <a:ext uri="{FF2B5EF4-FFF2-40B4-BE49-F238E27FC236}">
+                <a16:creationId xmlns:a16="http://schemas.microsoft.com/office/drawing/2014/main" id="{3B8C7EFE-AF5F-41FF-8713-3551F97BB55D}"/>
               </a:ext>
             </a:extLst>
           </p:cNvPr>
           <p:cNvCxnSpPr>
             <a:cxnSpLocks/>
-            <a:stCxn id="438" idx="2"/>
-            <a:endCxn id="388" idx="1"/>
+            <a:stCxn id="370" idx="2"/>
+            <a:endCxn id="4" idx="1"/>
           </p:cNvCxnSpPr>
           <p:nvPr/>
         </p:nvCxnSpPr>
         <p:spPr>
           <a:xfrm rot="5400000" flipH="1">
-            <a:off x="1879332" y="2555755"/>
-            <a:ext cx="1489620" cy="3609525"/>
+            <a:off x="667567" y="1575554"/>
+            <a:ext cx="1364484" cy="1060859"/>
           </a:xfrm>
           <a:prstGeom prst="bentConnector4">
             <a:avLst>
-              <a:gd name="adj1" fmla="val -81236"/>
-              <a:gd name="adj2" fmla="val 106333"/>
+              <a:gd name="adj1" fmla="val -16754"/>
+              <a:gd name="adj2" fmla="val 121549"/>
             </a:avLst>
-          </a:prstGeom>
-          <a:ln>
-            <a:solidFill>
-              <a:schemeClr val="accent1"/>
-            </a:solidFill>
-            <a:tailEnd type="triangle"/>
-          </a:ln>
-        </p:spPr>
-        <p:style>
-          <a:lnRef idx="3">
-            <a:schemeClr val="accent2"/>
-          </a:lnRef>
-          <a:fillRef idx="0">
-            <a:schemeClr val="accent2"/>
-          </a:fillRef>
-          <a:effectRef idx="2">
-            <a:schemeClr val="accent2"/>
-          </a:effectRef>
-          <a:fontRef idx="minor">
-            <a:schemeClr val="tx1"/>
-          </a:fontRef>
-        </p:style>
-      </p:cxnSp>
-      <p:cxnSp>
-        <p:nvCxnSpPr>
-          <p:cNvPr id="51" name="직선 화살표 연결선 50">
-            <a:extLst>
-              <a:ext uri="{FF2B5EF4-FFF2-40B4-BE49-F238E27FC236}">
-                <a16:creationId xmlns:a16="http://schemas.microsoft.com/office/drawing/2014/main" id="{3B8C7EFE-AF5F-41FF-8713-3551F97BB55D}"/>
-              </a:ext>
-            </a:extLst>
-          </p:cNvPr>
-          <p:cNvCxnSpPr>
-            <a:cxnSpLocks/>
-            <a:stCxn id="370" idx="2"/>
-          </p:cNvCxnSpPr>
-          <p:nvPr/>
-        </p:nvCxnSpPr>
-        <p:spPr>
-          <a:xfrm>
-            <a:off x="1880238" y="2788225"/>
-            <a:ext cx="0" cy="500259"/>
-          </a:xfrm>
-          <a:prstGeom prst="straightConnector1">
-            <a:avLst/>
           </a:prstGeom>
           <a:ln>
             <a:tailEnd type="triangle"/>
@@ -3735,7 +4348,7 @@
         </p:nvSpPr>
         <p:spPr>
           <a:xfrm>
-            <a:off x="6218625" y="5496627"/>
+            <a:off x="654764" y="6255711"/>
             <a:ext cx="1829569" cy="423731"/>
           </a:xfrm>
           <a:prstGeom prst="flowChartTerminator">
@@ -3825,7 +4438,7 @@
                   </a:schemeClr>
                 </a:solidFill>
               </a:rPr>
-              <a:t>승리</a:t>
+              <a:t>비김</a:t>
             </a:r>
             <a:r>
               <a:rPr lang="en-US" altLang="ko-KR" sz="1000" b="1" dirty="0">
@@ -3863,7 +4476,7 @@
         </p:nvSpPr>
         <p:spPr>
           <a:xfrm>
-            <a:off x="3251867" y="2084719"/>
+            <a:off x="3279693" y="2093591"/>
             <a:ext cx="2074820" cy="703505"/>
           </a:xfrm>
           <a:prstGeom prst="flowChartDecision">
@@ -3900,7 +4513,7 @@
                   </a:schemeClr>
                 </a:solidFill>
               </a:rPr>
-              <a:t>패배</a:t>
+              <a:t>내가 이김</a:t>
             </a:r>
             <a:r>
               <a:rPr lang="en-US" altLang="ko-KR" sz="1000" b="1" dirty="0">
@@ -3926,54 +4539,6 @@
       </p:sp>
       <p:cxnSp>
         <p:nvCxnSpPr>
-          <p:cNvPr id="380" name="직선 화살표 연결선 379">
-            <a:extLst>
-              <a:ext uri="{FF2B5EF4-FFF2-40B4-BE49-F238E27FC236}">
-                <a16:creationId xmlns:a16="http://schemas.microsoft.com/office/drawing/2014/main" id="{7BC9028D-F1FA-4D30-A29A-C64163F48BC6}"/>
-              </a:ext>
-            </a:extLst>
-          </p:cNvPr>
-          <p:cNvCxnSpPr>
-            <a:cxnSpLocks/>
-            <a:stCxn id="438" idx="0"/>
-            <a:endCxn id="389" idx="2"/>
-          </p:cNvCxnSpPr>
-          <p:nvPr/>
-        </p:nvCxnSpPr>
-        <p:spPr>
-          <a:xfrm rot="16200000" flipV="1">
-            <a:off x="4157707" y="4130624"/>
-            <a:ext cx="402768" cy="139627"/>
-          </a:xfrm>
-          <a:prstGeom prst="bentConnector3">
-            <a:avLst>
-              <a:gd name="adj1" fmla="val 50000"/>
-            </a:avLst>
-          </a:prstGeom>
-          <a:ln>
-            <a:solidFill>
-              <a:srgbClr val="FF0000"/>
-            </a:solidFill>
-            <a:tailEnd type="triangle"/>
-          </a:ln>
-        </p:spPr>
-        <p:style>
-          <a:lnRef idx="3">
-            <a:schemeClr val="accent1"/>
-          </a:lnRef>
-          <a:fillRef idx="0">
-            <a:schemeClr val="accent1"/>
-          </a:fillRef>
-          <a:effectRef idx="2">
-            <a:schemeClr val="accent1"/>
-          </a:effectRef>
-          <a:fontRef idx="minor">
-            <a:schemeClr val="tx1"/>
-          </a:fontRef>
-        </p:style>
-      </p:cxnSp>
-      <p:cxnSp>
-        <p:nvCxnSpPr>
           <p:cNvPr id="381" name="직선 화살표 연결선 380">
             <a:extLst>
               <a:ext uri="{FF2B5EF4-FFF2-40B4-BE49-F238E27FC236}">
@@ -3989,9 +4554,9 @@
           <p:nvPr/>
         </p:nvCxnSpPr>
         <p:spPr>
-          <a:xfrm flipV="1">
-            <a:off x="2917648" y="2436472"/>
-            <a:ext cx="334219" cy="1"/>
+          <a:xfrm>
+            <a:off x="2917648" y="2436473"/>
+            <a:ext cx="362045" cy="8871"/>
           </a:xfrm>
           <a:prstGeom prst="straightConnector1">
             <a:avLst/>
@@ -4020,27 +4585,206 @@
       </p:cxnSp>
       <p:cxnSp>
         <p:nvCxnSpPr>
-          <p:cNvPr id="384" name="직선 화살표 연결선 383">
-            <a:extLst>
-              <a:ext uri="{FF2B5EF4-FFF2-40B4-BE49-F238E27FC236}">
-                <a16:creationId xmlns:a16="http://schemas.microsoft.com/office/drawing/2014/main" id="{4180C53F-5964-45DF-998B-95CDEE300535}"/>
+          <p:cNvPr id="387" name="직선 화살표 연결선 386">
+            <a:extLst>
+              <a:ext uri="{FF2B5EF4-FFF2-40B4-BE49-F238E27FC236}">
+                <a16:creationId xmlns:a16="http://schemas.microsoft.com/office/drawing/2014/main" id="{A2EAA474-CF64-4E72-A409-B8C448A400E7}"/>
               </a:ext>
             </a:extLst>
           </p:cNvPr>
           <p:cNvCxnSpPr>
             <a:cxnSpLocks/>
-            <a:stCxn id="377" idx="0"/>
-            <a:endCxn id="4" idx="3"/>
+            <a:stCxn id="377" idx="2"/>
+            <a:endCxn id="388" idx="0"/>
           </p:cNvCxnSpPr>
           <p:nvPr/>
         </p:nvCxnSpPr>
         <p:spPr>
-          <a:xfrm rot="16200000" flipV="1">
-            <a:off x="3284698" y="1080139"/>
-            <a:ext cx="660978" cy="1348181"/>
+          <a:xfrm>
+            <a:off x="4317103" y="2797096"/>
+            <a:ext cx="976" cy="292108"/>
           </a:xfrm>
-          <a:prstGeom prst="bentConnector2">
+          <a:prstGeom prst="straightConnector1">
             <a:avLst/>
+          </a:prstGeom>
+          <a:ln>
+            <a:tailEnd type="triangle"/>
+          </a:ln>
+        </p:spPr>
+        <p:style>
+          <a:lnRef idx="3">
+            <a:schemeClr val="accent1"/>
+          </a:lnRef>
+          <a:fillRef idx="0">
+            <a:schemeClr val="accent1"/>
+          </a:fillRef>
+          <a:effectRef idx="2">
+            <a:schemeClr val="accent1"/>
+          </a:effectRef>
+          <a:fontRef idx="minor">
+            <a:schemeClr val="tx1"/>
+          </a:fontRef>
+        </p:style>
+      </p:cxnSp>
+      <p:sp>
+        <p:nvSpPr>
+          <p:cNvPr id="388" name="순서도: 처리 387">
+            <a:extLst>
+              <a:ext uri="{FF2B5EF4-FFF2-40B4-BE49-F238E27FC236}">
+                <a16:creationId xmlns:a16="http://schemas.microsoft.com/office/drawing/2014/main" id="{1BF402D2-EE6C-4DFB-B48B-B52CFF6D4079}"/>
+              </a:ext>
+            </a:extLst>
+          </p:cNvPr>
+          <p:cNvSpPr/>
+          <p:nvPr/>
+        </p:nvSpPr>
+        <p:spPr>
+          <a:xfrm>
+            <a:off x="3257220" y="3089204"/>
+            <a:ext cx="2121717" cy="703505"/>
+          </a:xfrm>
+          <a:prstGeom prst="flowChartProcess">
+            <a:avLst/>
+          </a:prstGeom>
+        </p:spPr>
+        <p:style>
+          <a:lnRef idx="2">
+            <a:schemeClr val="accent1">
+              <a:shade val="50000"/>
+            </a:schemeClr>
+          </a:lnRef>
+          <a:fillRef idx="1">
+            <a:schemeClr val="accent1"/>
+          </a:fillRef>
+          <a:effectRef idx="0">
+            <a:schemeClr val="accent1"/>
+          </a:effectRef>
+          <a:fontRef idx="minor">
+            <a:schemeClr val="lt1"/>
+          </a:fontRef>
+        </p:style>
+        <p:txBody>
+          <a:bodyPr rtlCol="0" anchor="ctr"/>
+          <a:lstStyle/>
+          <a:p>
+            <a:pPr algn="ctr"/>
+            <a:r>
+              <a:rPr lang="ko-KR" altLang="en-US" sz="1000" b="1" dirty="0">
+                <a:solidFill>
+                  <a:srgbClr val="FFC000"/>
+                </a:solidFill>
+              </a:rPr>
+              <a:t>내가 공격권을 가진다</a:t>
+            </a:r>
+            <a:r>
+              <a:rPr lang="en-US" altLang="ko-KR" sz="1000" b="1" dirty="0">
+                <a:solidFill>
+                  <a:srgbClr val="FFC000"/>
+                </a:solidFill>
+              </a:rPr>
+              <a:t>.</a:t>
+            </a:r>
+            <a:endParaRPr lang="ko-KR" altLang="en-US" sz="1000" b="1" dirty="0">
+              <a:solidFill>
+                <a:srgbClr val="FFC000"/>
+              </a:solidFill>
+            </a:endParaRPr>
+          </a:p>
+        </p:txBody>
+      </p:sp>
+      <p:sp>
+        <p:nvSpPr>
+          <p:cNvPr id="389" name="순서도: 처리 388">
+            <a:extLst>
+              <a:ext uri="{FF2B5EF4-FFF2-40B4-BE49-F238E27FC236}">
+                <a16:creationId xmlns:a16="http://schemas.microsoft.com/office/drawing/2014/main" id="{B7341EBC-6E38-4A88-9B3E-874AD706BA1F}"/>
+              </a:ext>
+            </a:extLst>
+          </p:cNvPr>
+          <p:cNvSpPr/>
+          <p:nvPr/>
+        </p:nvSpPr>
+        <p:spPr>
+          <a:xfrm>
+            <a:off x="4348009" y="213869"/>
+            <a:ext cx="2121717" cy="703505"/>
+          </a:xfrm>
+          <a:prstGeom prst="flowChartProcess">
+            <a:avLst/>
+          </a:prstGeom>
+        </p:spPr>
+        <p:style>
+          <a:lnRef idx="2">
+            <a:schemeClr val="accent1">
+              <a:shade val="50000"/>
+            </a:schemeClr>
+          </a:lnRef>
+          <a:fillRef idx="1">
+            <a:schemeClr val="accent1"/>
+          </a:fillRef>
+          <a:effectRef idx="0">
+            <a:schemeClr val="accent1"/>
+          </a:effectRef>
+          <a:fontRef idx="minor">
+            <a:schemeClr val="lt1"/>
+          </a:fontRef>
+        </p:style>
+        <p:txBody>
+          <a:bodyPr rtlCol="0" anchor="ctr"/>
+          <a:lstStyle/>
+          <a:p>
+            <a:pPr algn="ctr"/>
+            <a:r>
+              <a:rPr lang="ko-KR" altLang="en-US" sz="1000" b="1" dirty="0">
+                <a:solidFill>
+                  <a:srgbClr val="FFC000"/>
+                </a:solidFill>
+              </a:rPr>
+              <a:t>상대방이 공격권을 가진다</a:t>
+            </a:r>
+            <a:r>
+              <a:rPr lang="en-US" altLang="ko-KR" sz="1000" b="1" dirty="0">
+                <a:solidFill>
+                  <a:srgbClr val="FFC000"/>
+                </a:solidFill>
+              </a:rPr>
+              <a:t>.</a:t>
+            </a:r>
+            <a:endParaRPr lang="ko-KR" altLang="en-US" sz="1000" b="1" dirty="0">
+              <a:solidFill>
+                <a:srgbClr val="FFC000"/>
+              </a:solidFill>
+            </a:endParaRPr>
+          </a:p>
+        </p:txBody>
+      </p:sp>
+      <p:cxnSp>
+        <p:nvCxnSpPr>
+          <p:cNvPr id="402" name="직선 화살표 연결선 401">
+            <a:extLst>
+              <a:ext uri="{FF2B5EF4-FFF2-40B4-BE49-F238E27FC236}">
+                <a16:creationId xmlns:a16="http://schemas.microsoft.com/office/drawing/2014/main" id="{66CECBA9-4D9C-48A2-8366-4EE6E7639CA3}"/>
+              </a:ext>
+            </a:extLst>
+          </p:cNvPr>
+          <p:cNvCxnSpPr>
+            <a:cxnSpLocks/>
+            <a:stCxn id="377" idx="3"/>
+            <a:endCxn id="389" idx="1"/>
+          </p:cNvCxnSpPr>
+          <p:nvPr/>
+        </p:nvCxnSpPr>
+        <p:spPr>
+          <a:xfrm flipH="1" flipV="1">
+            <a:off x="4348009" y="565622"/>
+            <a:ext cx="1006504" cy="1879722"/>
+          </a:xfrm>
+          <a:prstGeom prst="bentConnector5">
+            <a:avLst>
+              <a:gd name="adj1" fmla="val -22712"/>
+              <a:gd name="adj2" fmla="val 50000"/>
+              <a:gd name="adj3" fmla="val 122712"/>
+            </a:avLst>
           </a:prstGeom>
           <a:ln>
             <a:solidFill>
@@ -4064,239 +4808,21 @@
           </a:fontRef>
         </p:style>
       </p:cxnSp>
-      <p:cxnSp>
-        <p:nvCxnSpPr>
-          <p:cNvPr id="387" name="직선 화살표 연결선 386">
-            <a:extLst>
-              <a:ext uri="{FF2B5EF4-FFF2-40B4-BE49-F238E27FC236}">
-                <a16:creationId xmlns:a16="http://schemas.microsoft.com/office/drawing/2014/main" id="{A2EAA474-CF64-4E72-A409-B8C448A400E7}"/>
-              </a:ext>
-            </a:extLst>
-          </p:cNvPr>
-          <p:cNvCxnSpPr>
-            <a:cxnSpLocks/>
-            <a:stCxn id="377" idx="2"/>
-            <a:endCxn id="389" idx="0"/>
-          </p:cNvCxnSpPr>
+      <p:sp>
+        <p:nvSpPr>
+          <p:cNvPr id="407" name="순서도: 판단 406">
+            <a:extLst>
+              <a:ext uri="{FF2B5EF4-FFF2-40B4-BE49-F238E27FC236}">
+                <a16:creationId xmlns:a16="http://schemas.microsoft.com/office/drawing/2014/main" id="{4AFD0173-9AF7-43E3-BD1B-170C4676FFFA}"/>
+              </a:ext>
+            </a:extLst>
+          </p:cNvPr>
+          <p:cNvSpPr/>
           <p:nvPr/>
-        </p:nvCxnSpPr>
+        </p:nvSpPr>
         <p:spPr>
           <a:xfrm>
-            <a:off x="4289277" y="2788224"/>
-            <a:ext cx="0" cy="507325"/>
-          </a:xfrm>
-          <a:prstGeom prst="straightConnector1">
-            <a:avLst/>
-          </a:prstGeom>
-          <a:ln>
-            <a:tailEnd type="triangle"/>
-          </a:ln>
-        </p:spPr>
-        <p:style>
-          <a:lnRef idx="3">
-            <a:schemeClr val="accent1"/>
-          </a:lnRef>
-          <a:fillRef idx="0">
-            <a:schemeClr val="accent1"/>
-          </a:fillRef>
-          <a:effectRef idx="2">
-            <a:schemeClr val="accent1"/>
-          </a:effectRef>
-          <a:fontRef idx="minor">
-            <a:schemeClr val="tx1"/>
-          </a:fontRef>
-        </p:style>
-      </p:cxnSp>
-      <p:sp>
-        <p:nvSpPr>
-          <p:cNvPr id="388" name="순서도: 처리 387">
-            <a:extLst>
-              <a:ext uri="{FF2B5EF4-FFF2-40B4-BE49-F238E27FC236}">
-                <a16:creationId xmlns:a16="http://schemas.microsoft.com/office/drawing/2014/main" id="{1BF402D2-EE6C-4DFB-B48B-B52CFF6D4079}"/>
-              </a:ext>
-            </a:extLst>
-          </p:cNvPr>
-          <p:cNvSpPr/>
-          <p:nvPr/>
-        </p:nvSpPr>
-        <p:spPr>
-          <a:xfrm>
-            <a:off x="819379" y="3263954"/>
-            <a:ext cx="2121717" cy="703505"/>
-          </a:xfrm>
-          <a:prstGeom prst="flowChartProcess">
-            <a:avLst/>
-          </a:prstGeom>
-        </p:spPr>
-        <p:style>
-          <a:lnRef idx="2">
-            <a:schemeClr val="accent1">
-              <a:shade val="50000"/>
-            </a:schemeClr>
-          </a:lnRef>
-          <a:fillRef idx="1">
-            <a:schemeClr val="accent1"/>
-          </a:fillRef>
-          <a:effectRef idx="0">
-            <a:schemeClr val="accent1"/>
-          </a:effectRef>
-          <a:fontRef idx="minor">
-            <a:schemeClr val="lt1"/>
-          </a:fontRef>
-        </p:style>
-        <p:txBody>
-          <a:bodyPr rtlCol="0" anchor="ctr"/>
-          <a:lstStyle/>
-          <a:p>
-            <a:pPr algn="ctr"/>
-            <a:r>
-              <a:rPr lang="ko-KR" altLang="en-US" sz="1000" b="1" dirty="0">
-                <a:solidFill>
-                  <a:srgbClr val="FFC000"/>
-                </a:solidFill>
-              </a:rPr>
-              <a:t>공격한다</a:t>
-            </a:r>
-            <a:r>
-              <a:rPr lang="en-US" altLang="ko-KR" sz="1000" b="1" dirty="0">
-                <a:solidFill>
-                  <a:srgbClr val="FFC000"/>
-                </a:solidFill>
-              </a:rPr>
-              <a:t>.</a:t>
-            </a:r>
-            <a:endParaRPr lang="ko-KR" altLang="en-US" sz="1000" b="1" dirty="0">
-              <a:solidFill>
-                <a:srgbClr val="FFC000"/>
-              </a:solidFill>
-            </a:endParaRPr>
-          </a:p>
-        </p:txBody>
-      </p:sp>
-      <p:sp>
-        <p:nvSpPr>
-          <p:cNvPr id="389" name="순서도: 처리 388">
-            <a:extLst>
-              <a:ext uri="{FF2B5EF4-FFF2-40B4-BE49-F238E27FC236}">
-                <a16:creationId xmlns:a16="http://schemas.microsoft.com/office/drawing/2014/main" id="{B7341EBC-6E38-4A88-9B3E-874AD706BA1F}"/>
-              </a:ext>
-            </a:extLst>
-          </p:cNvPr>
-          <p:cNvSpPr/>
-          <p:nvPr/>
-        </p:nvSpPr>
-        <p:spPr>
-          <a:xfrm>
-            <a:off x="3228418" y="3295549"/>
-            <a:ext cx="2121717" cy="703505"/>
-          </a:xfrm>
-          <a:prstGeom prst="flowChartProcess">
-            <a:avLst/>
-          </a:prstGeom>
-        </p:spPr>
-        <p:style>
-          <a:lnRef idx="2">
-            <a:schemeClr val="accent1">
-              <a:shade val="50000"/>
-            </a:schemeClr>
-          </a:lnRef>
-          <a:fillRef idx="1">
-            <a:schemeClr val="accent1"/>
-          </a:fillRef>
-          <a:effectRef idx="0">
-            <a:schemeClr val="accent1"/>
-          </a:effectRef>
-          <a:fontRef idx="minor">
-            <a:schemeClr val="lt1"/>
-          </a:fontRef>
-        </p:style>
-        <p:txBody>
-          <a:bodyPr rtlCol="0" anchor="ctr"/>
-          <a:lstStyle/>
-          <a:p>
-            <a:pPr algn="ctr"/>
-            <a:r>
-              <a:rPr lang="ko-KR" altLang="en-US" sz="1000" b="1" dirty="0">
-                <a:solidFill>
-                  <a:srgbClr val="FFC000"/>
-                </a:solidFill>
-              </a:rPr>
-              <a:t>방어한다</a:t>
-            </a:r>
-            <a:r>
-              <a:rPr lang="en-US" altLang="ko-KR" sz="1000" b="1" dirty="0">
-                <a:solidFill>
-                  <a:srgbClr val="FFC000"/>
-                </a:solidFill>
-              </a:rPr>
-              <a:t>.</a:t>
-            </a:r>
-            <a:endParaRPr lang="ko-KR" altLang="en-US" sz="1000" b="1" dirty="0">
-              <a:solidFill>
-                <a:srgbClr val="FFC000"/>
-              </a:solidFill>
-            </a:endParaRPr>
-          </a:p>
-        </p:txBody>
-      </p:sp>
-      <p:cxnSp>
-        <p:nvCxnSpPr>
-          <p:cNvPr id="390" name="직선 화살표 연결선 389">
-            <a:extLst>
-              <a:ext uri="{FF2B5EF4-FFF2-40B4-BE49-F238E27FC236}">
-                <a16:creationId xmlns:a16="http://schemas.microsoft.com/office/drawing/2014/main" id="{4E90533E-35F7-4852-A3BE-61C4E69E3DE8}"/>
-              </a:ext>
-            </a:extLst>
-          </p:cNvPr>
-          <p:cNvCxnSpPr>
-            <a:cxnSpLocks/>
-            <a:stCxn id="388" idx="2"/>
-            <a:endCxn id="393" idx="0"/>
-          </p:cNvCxnSpPr>
-          <p:nvPr/>
-        </p:nvCxnSpPr>
-        <p:spPr>
-          <a:xfrm flipH="1">
-            <a:off x="1880237" y="3967459"/>
-            <a:ext cx="1" cy="436175"/>
-          </a:xfrm>
-          <a:prstGeom prst="straightConnector1">
-            <a:avLst/>
-          </a:prstGeom>
-          <a:ln>
-            <a:tailEnd type="triangle"/>
-          </a:ln>
-        </p:spPr>
-        <p:style>
-          <a:lnRef idx="3">
-            <a:schemeClr val="dk1"/>
-          </a:lnRef>
-          <a:fillRef idx="0">
-            <a:schemeClr val="dk1"/>
-          </a:fillRef>
-          <a:effectRef idx="2">
-            <a:schemeClr val="dk1"/>
-          </a:effectRef>
-          <a:fontRef idx="minor">
-            <a:schemeClr val="tx1"/>
-          </a:fontRef>
-        </p:style>
-      </p:cxnSp>
-      <p:sp>
-        <p:nvSpPr>
-          <p:cNvPr id="393" name="순서도: 판단 392">
-            <a:extLst>
-              <a:ext uri="{FF2B5EF4-FFF2-40B4-BE49-F238E27FC236}">
-                <a16:creationId xmlns:a16="http://schemas.microsoft.com/office/drawing/2014/main" id="{AEB3D022-75FE-4531-B31B-37839D2E27F0}"/>
-              </a:ext>
-            </a:extLst>
-          </p:cNvPr>
-          <p:cNvSpPr/>
-          <p:nvPr/>
-        </p:nvSpPr>
-        <p:spPr>
-          <a:xfrm>
-            <a:off x="842827" y="4403634"/>
+            <a:off x="5901262" y="4912098"/>
             <a:ext cx="2074820" cy="703505"/>
           </a:xfrm>
           <a:prstGeom prst="flowChartDecision">
@@ -4333,7 +4859,7 @@
                   </a:schemeClr>
                 </a:solidFill>
               </a:rPr>
-              <a:t>같은 손 모양인가</a:t>
+              <a:t>같은 손</a:t>
             </a:r>
             <a:r>
               <a:rPr lang="en-US" altLang="ko-KR" sz="1000" b="1" dirty="0">
@@ -4357,64 +4883,21 @@
           </a:p>
         </p:txBody>
       </p:sp>
-      <p:cxnSp>
-        <p:nvCxnSpPr>
-          <p:cNvPr id="396" name="직선 화살표 연결선 395">
-            <a:extLst>
-              <a:ext uri="{FF2B5EF4-FFF2-40B4-BE49-F238E27FC236}">
-                <a16:creationId xmlns:a16="http://schemas.microsoft.com/office/drawing/2014/main" id="{E75E7472-AC18-4323-BC06-E2F8D7B4A441}"/>
-              </a:ext>
-            </a:extLst>
-          </p:cNvPr>
-          <p:cNvCxnSpPr>
-            <a:cxnSpLocks/>
-            <a:stCxn id="393" idx="2"/>
-            <a:endCxn id="399" idx="0"/>
-          </p:cNvCxnSpPr>
+      <p:sp>
+        <p:nvSpPr>
+          <p:cNvPr id="412" name="순서도: 처리 411">
+            <a:extLst>
+              <a:ext uri="{FF2B5EF4-FFF2-40B4-BE49-F238E27FC236}">
+                <a16:creationId xmlns:a16="http://schemas.microsoft.com/office/drawing/2014/main" id="{A3ECACFD-F6F8-4F53-AA09-475902BBCC06}"/>
+              </a:ext>
+            </a:extLst>
+          </p:cNvPr>
+          <p:cNvSpPr/>
           <p:nvPr/>
-        </p:nvCxnSpPr>
+        </p:nvSpPr>
         <p:spPr>
           <a:xfrm>
-            <a:off x="1880237" y="5107139"/>
-            <a:ext cx="0" cy="348781"/>
-          </a:xfrm>
-          <a:prstGeom prst="straightConnector1">
-            <a:avLst/>
-          </a:prstGeom>
-          <a:ln>
-            <a:tailEnd type="triangle"/>
-          </a:ln>
-        </p:spPr>
-        <p:style>
-          <a:lnRef idx="3">
-            <a:schemeClr val="accent1"/>
-          </a:lnRef>
-          <a:fillRef idx="0">
-            <a:schemeClr val="accent1"/>
-          </a:fillRef>
-          <a:effectRef idx="2">
-            <a:schemeClr val="accent1"/>
-          </a:effectRef>
-          <a:fontRef idx="minor">
-            <a:schemeClr val="tx1"/>
-          </a:fontRef>
-        </p:style>
-      </p:cxnSp>
-      <p:sp>
-        <p:nvSpPr>
-          <p:cNvPr id="399" name="순서도: 처리 398">
-            <a:extLst>
-              <a:ext uri="{FF2B5EF4-FFF2-40B4-BE49-F238E27FC236}">
-                <a16:creationId xmlns:a16="http://schemas.microsoft.com/office/drawing/2014/main" id="{0C99B941-F954-4CB8-ABB7-D37ED2AA0722}"/>
-              </a:ext>
-            </a:extLst>
-          </p:cNvPr>
-          <p:cNvSpPr/>
-          <p:nvPr/>
-        </p:nvSpPr>
-        <p:spPr>
-          <a:xfrm>
-            <a:off x="914837" y="5455920"/>
+            <a:off x="8330839" y="5008155"/>
             <a:ext cx="1930800" cy="505147"/>
           </a:xfrm>
           <a:prstGeom prst="flowChartProcess">
@@ -4453,349 +4936,6 @@
             <a:endParaRPr lang="en-US" altLang="ko-KR" sz="1000" b="1" dirty="0">
               <a:solidFill>
                 <a:srgbClr val="FFC000"/>
-              </a:solidFill>
-            </a:endParaRPr>
-          </a:p>
-        </p:txBody>
-      </p:sp>
-      <p:cxnSp>
-        <p:nvCxnSpPr>
-          <p:cNvPr id="402" name="직선 화살표 연결선 401">
-            <a:extLst>
-              <a:ext uri="{FF2B5EF4-FFF2-40B4-BE49-F238E27FC236}">
-                <a16:creationId xmlns:a16="http://schemas.microsoft.com/office/drawing/2014/main" id="{66CECBA9-4D9C-48A2-8366-4EE6E7639CA3}"/>
-              </a:ext>
-            </a:extLst>
-          </p:cNvPr>
-          <p:cNvCxnSpPr>
-            <a:cxnSpLocks/>
-            <a:stCxn id="393" idx="3"/>
-            <a:endCxn id="438" idx="1"/>
-          </p:cNvCxnSpPr>
-          <p:nvPr/>
-        </p:nvCxnSpPr>
-        <p:spPr>
-          <a:xfrm flipV="1">
-            <a:off x="2917647" y="4753575"/>
-            <a:ext cx="487319" cy="1812"/>
-          </a:xfrm>
-          <a:prstGeom prst="straightConnector1">
-            <a:avLst/>
-          </a:prstGeom>
-          <a:ln>
-            <a:solidFill>
-              <a:srgbClr val="FF0000"/>
-            </a:solidFill>
-            <a:tailEnd type="triangle"/>
-          </a:ln>
-        </p:spPr>
-        <p:style>
-          <a:lnRef idx="3">
-            <a:schemeClr val="accent2"/>
-          </a:lnRef>
-          <a:fillRef idx="0">
-            <a:schemeClr val="accent2"/>
-          </a:fillRef>
-          <a:effectRef idx="2">
-            <a:schemeClr val="accent2"/>
-          </a:effectRef>
-          <a:fontRef idx="minor">
-            <a:schemeClr val="tx1"/>
-          </a:fontRef>
-        </p:style>
-      </p:cxnSp>
-      <p:sp>
-        <p:nvSpPr>
-          <p:cNvPr id="407" name="순서도: 판단 406">
-            <a:extLst>
-              <a:ext uri="{FF2B5EF4-FFF2-40B4-BE49-F238E27FC236}">
-                <a16:creationId xmlns:a16="http://schemas.microsoft.com/office/drawing/2014/main" id="{4AFD0173-9AF7-43E3-BD1B-170C4676FFFA}"/>
-              </a:ext>
-            </a:extLst>
-          </p:cNvPr>
-          <p:cNvSpPr/>
-          <p:nvPr/>
-        </p:nvSpPr>
-        <p:spPr>
-          <a:xfrm>
-            <a:off x="6096000" y="3288483"/>
-            <a:ext cx="2074820" cy="703505"/>
-          </a:xfrm>
-          <a:prstGeom prst="flowChartDecision">
-            <a:avLst/>
-          </a:prstGeom>
-        </p:spPr>
-        <p:style>
-          <a:lnRef idx="2">
-            <a:schemeClr val="accent1">
-              <a:shade val="50000"/>
-            </a:schemeClr>
-          </a:lnRef>
-          <a:fillRef idx="1">
-            <a:schemeClr val="accent1"/>
-          </a:fillRef>
-          <a:effectRef idx="0">
-            <a:schemeClr val="accent1"/>
-          </a:effectRef>
-          <a:fontRef idx="minor">
-            <a:schemeClr val="lt1"/>
-          </a:fontRef>
-        </p:style>
-        <p:txBody>
-          <a:bodyPr rtlCol="0" anchor="ctr"/>
-          <a:lstStyle/>
-          <a:p>
-            <a:pPr algn="ctr"/>
-            <a:r>
-              <a:rPr lang="ko-KR" altLang="en-US" sz="1000" b="1" dirty="0">
-                <a:solidFill>
-                  <a:schemeClr val="accent6">
-                    <a:lumMod val="60000"/>
-                    <a:lumOff val="40000"/>
-                  </a:schemeClr>
-                </a:solidFill>
-              </a:rPr>
-              <a:t>같은 손 모양인가</a:t>
-            </a:r>
-            <a:r>
-              <a:rPr lang="en-US" altLang="ko-KR" sz="1000" b="1" dirty="0">
-                <a:solidFill>
-                  <a:schemeClr val="accent6">
-                    <a:lumMod val="60000"/>
-                    <a:lumOff val="40000"/>
-                  </a:schemeClr>
-                </a:solidFill>
-              </a:rPr>
-              <a:t>?</a:t>
-            </a:r>
-            <a:endParaRPr lang="ko-KR" altLang="en-US" sz="1000" b="1" dirty="0">
-              <a:solidFill>
-                <a:schemeClr val="accent6">
-                  <a:lumMod val="60000"/>
-                  <a:lumOff val="40000"/>
-                </a:schemeClr>
-              </a:solidFill>
-            </a:endParaRPr>
-          </a:p>
-        </p:txBody>
-      </p:sp>
-      <p:sp>
-        <p:nvSpPr>
-          <p:cNvPr id="412" name="순서도: 처리 411">
-            <a:extLst>
-              <a:ext uri="{FF2B5EF4-FFF2-40B4-BE49-F238E27FC236}">
-                <a16:creationId xmlns:a16="http://schemas.microsoft.com/office/drawing/2014/main" id="{A3ECACFD-F6F8-4F53-AA09-475902BBCC06}"/>
-              </a:ext>
-            </a:extLst>
-          </p:cNvPr>
-          <p:cNvSpPr/>
-          <p:nvPr/>
-        </p:nvSpPr>
-        <p:spPr>
-          <a:xfrm>
-            <a:off x="6168010" y="4501000"/>
-            <a:ext cx="1930800" cy="505147"/>
-          </a:xfrm>
-          <a:prstGeom prst="flowChartProcess">
-            <a:avLst/>
-          </a:prstGeom>
-        </p:spPr>
-        <p:style>
-          <a:lnRef idx="2">
-            <a:schemeClr val="accent1">
-              <a:shade val="50000"/>
-            </a:schemeClr>
-          </a:lnRef>
-          <a:fillRef idx="1">
-            <a:schemeClr val="accent1"/>
-          </a:fillRef>
-          <a:effectRef idx="0">
-            <a:schemeClr val="accent1"/>
-          </a:effectRef>
-          <a:fontRef idx="minor">
-            <a:schemeClr val="lt1"/>
-          </a:fontRef>
-        </p:style>
-        <p:txBody>
-          <a:bodyPr rtlCol="0" anchor="ctr"/>
-          <a:lstStyle/>
-          <a:p>
-            <a:pPr algn="ctr"/>
-            <a:r>
-              <a:rPr lang="ko-KR" altLang="en-US" sz="1000" b="1" dirty="0">
-                <a:solidFill>
-                  <a:srgbClr val="FFC000"/>
-                </a:solidFill>
-              </a:rPr>
-              <a:t>패배</a:t>
-            </a:r>
-            <a:endParaRPr lang="en-US" altLang="ko-KR" sz="1000" b="1" dirty="0">
-              <a:solidFill>
-                <a:srgbClr val="FFC000"/>
-              </a:solidFill>
-            </a:endParaRPr>
-          </a:p>
-        </p:txBody>
-      </p:sp>
-      <p:cxnSp>
-        <p:nvCxnSpPr>
-          <p:cNvPr id="413" name="직선 화살표 연결선 412">
-            <a:extLst>
-              <a:ext uri="{FF2B5EF4-FFF2-40B4-BE49-F238E27FC236}">
-                <a16:creationId xmlns:a16="http://schemas.microsoft.com/office/drawing/2014/main" id="{8BB179E8-F79A-43A4-9446-4869265E6290}"/>
-              </a:ext>
-            </a:extLst>
-          </p:cNvPr>
-          <p:cNvCxnSpPr>
-            <a:cxnSpLocks/>
-            <a:stCxn id="407" idx="0"/>
-            <a:endCxn id="485" idx="2"/>
-          </p:cNvCxnSpPr>
-          <p:nvPr/>
-        </p:nvCxnSpPr>
-        <p:spPr>
-          <a:xfrm flipV="1">
-            <a:off x="7133410" y="1902441"/>
-            <a:ext cx="0" cy="1386042"/>
-          </a:xfrm>
-          <a:prstGeom prst="straightConnector1">
-            <a:avLst/>
-          </a:prstGeom>
-          <a:ln>
-            <a:solidFill>
-              <a:srgbClr val="FF0000"/>
-            </a:solidFill>
-            <a:tailEnd type="triangle"/>
-          </a:ln>
-        </p:spPr>
-        <p:style>
-          <a:lnRef idx="3">
-            <a:schemeClr val="accent2"/>
-          </a:lnRef>
-          <a:fillRef idx="0">
-            <a:schemeClr val="accent2"/>
-          </a:fillRef>
-          <a:effectRef idx="2">
-            <a:schemeClr val="accent2"/>
-          </a:effectRef>
-          <a:fontRef idx="minor">
-            <a:schemeClr val="tx1"/>
-          </a:fontRef>
-        </p:style>
-      </p:cxnSp>
-      <p:cxnSp>
-        <p:nvCxnSpPr>
-          <p:cNvPr id="415" name="직선 화살표 연결선 414">
-            <a:extLst>
-              <a:ext uri="{FF2B5EF4-FFF2-40B4-BE49-F238E27FC236}">
-                <a16:creationId xmlns:a16="http://schemas.microsoft.com/office/drawing/2014/main" id="{06E8F56F-7A72-45F2-8BD7-E492F9429885}"/>
-              </a:ext>
-            </a:extLst>
-          </p:cNvPr>
-          <p:cNvCxnSpPr>
-            <a:cxnSpLocks/>
-            <a:stCxn id="407" idx="2"/>
-            <a:endCxn id="412" idx="0"/>
-          </p:cNvCxnSpPr>
-          <p:nvPr/>
-        </p:nvCxnSpPr>
-        <p:spPr>
-          <a:xfrm>
-            <a:off x="7133410" y="3991988"/>
-            <a:ext cx="0" cy="509012"/>
-          </a:xfrm>
-          <a:prstGeom prst="straightConnector1">
-            <a:avLst/>
-          </a:prstGeom>
-          <a:ln>
-            <a:tailEnd type="triangle"/>
-          </a:ln>
-        </p:spPr>
-        <p:style>
-          <a:lnRef idx="3">
-            <a:schemeClr val="accent1"/>
-          </a:lnRef>
-          <a:fillRef idx="0">
-            <a:schemeClr val="accent1"/>
-          </a:fillRef>
-          <a:effectRef idx="2">
-            <a:schemeClr val="accent1"/>
-          </a:effectRef>
-          <a:fontRef idx="minor">
-            <a:schemeClr val="tx1"/>
-          </a:fontRef>
-        </p:style>
-      </p:cxnSp>
-      <p:sp>
-        <p:nvSpPr>
-          <p:cNvPr id="438" name="순서도: 판단 437">
-            <a:extLst>
-              <a:ext uri="{FF2B5EF4-FFF2-40B4-BE49-F238E27FC236}">
-                <a16:creationId xmlns:a16="http://schemas.microsoft.com/office/drawing/2014/main" id="{469F43AA-E76C-49FE-894F-0EBB18EA75D1}"/>
-              </a:ext>
-            </a:extLst>
-          </p:cNvPr>
-          <p:cNvSpPr/>
-          <p:nvPr/>
-        </p:nvSpPr>
-        <p:spPr>
-          <a:xfrm>
-            <a:off x="3404966" y="4401822"/>
-            <a:ext cx="2047875" cy="703505"/>
-          </a:xfrm>
-          <a:prstGeom prst="flowChartDecision">
-            <a:avLst/>
-          </a:prstGeom>
-        </p:spPr>
-        <p:style>
-          <a:lnRef idx="2">
-            <a:schemeClr val="accent1">
-              <a:shade val="50000"/>
-            </a:schemeClr>
-          </a:lnRef>
-          <a:fillRef idx="1">
-            <a:schemeClr val="accent1"/>
-          </a:fillRef>
-          <a:effectRef idx="0">
-            <a:schemeClr val="accent1"/>
-          </a:effectRef>
-          <a:fontRef idx="minor">
-            <a:schemeClr val="lt1"/>
-          </a:fontRef>
-        </p:style>
-        <p:txBody>
-          <a:bodyPr rtlCol="0" anchor="ctr"/>
-          <a:lstStyle/>
-          <a:p>
-            <a:pPr algn="ctr"/>
-            <a:r>
-              <a:rPr lang="ko-KR" altLang="en-US" sz="1000" b="1" dirty="0">
-                <a:solidFill>
-                  <a:schemeClr val="accent6">
-                    <a:lumMod val="60000"/>
-                    <a:lumOff val="40000"/>
-                  </a:schemeClr>
-                </a:solidFill>
-              </a:rPr>
-              <a:t>손 모양이 이겼는가</a:t>
-            </a:r>
-            <a:r>
-              <a:rPr lang="en-US" altLang="ko-KR" sz="1000" b="1" dirty="0">
-                <a:solidFill>
-                  <a:schemeClr val="accent6">
-                    <a:lumMod val="60000"/>
-                    <a:lumOff val="40000"/>
-                  </a:schemeClr>
-                </a:solidFill>
-              </a:rPr>
-              <a:t>?</a:t>
-            </a:r>
-            <a:endParaRPr lang="ko-KR" altLang="en-US" sz="1000" b="1" dirty="0">
-              <a:solidFill>
-                <a:schemeClr val="accent6">
-                  <a:lumMod val="60000"/>
-                  <a:lumOff val="40000"/>
-                </a:schemeClr>
               </a:solidFill>
             </a:endParaRPr>
           </a:p>
@@ -4886,26 +5026,515 @@
           </a:fontRef>
         </p:style>
       </p:cxnSp>
+      <p:sp>
+        <p:nvSpPr>
+          <p:cNvPr id="485" name="순서도: 판단 484">
+            <a:extLst>
+              <a:ext uri="{FF2B5EF4-FFF2-40B4-BE49-F238E27FC236}">
+                <a16:creationId xmlns:a16="http://schemas.microsoft.com/office/drawing/2014/main" id="{6A6EFADE-9B50-4175-8E89-B0763EFF2B03}"/>
+              </a:ext>
+            </a:extLst>
+          </p:cNvPr>
+          <p:cNvSpPr/>
+          <p:nvPr/>
+        </p:nvSpPr>
+        <p:spPr>
+          <a:xfrm>
+            <a:off x="5921840" y="3848256"/>
+            <a:ext cx="2033664" cy="703505"/>
+          </a:xfrm>
+          <a:prstGeom prst="flowChartDecision">
+            <a:avLst/>
+          </a:prstGeom>
+        </p:spPr>
+        <p:style>
+          <a:lnRef idx="2">
+            <a:schemeClr val="accent1">
+              <a:shade val="50000"/>
+            </a:schemeClr>
+          </a:lnRef>
+          <a:fillRef idx="1">
+            <a:schemeClr val="accent1"/>
+          </a:fillRef>
+          <a:effectRef idx="0">
+            <a:schemeClr val="accent1"/>
+          </a:effectRef>
+          <a:fontRef idx="minor">
+            <a:schemeClr val="lt1"/>
+          </a:fontRef>
+        </p:style>
+        <p:txBody>
+          <a:bodyPr rtlCol="0" anchor="ctr"/>
+          <a:lstStyle/>
+          <a:p>
+            <a:pPr algn="ctr"/>
+            <a:r>
+              <a:rPr lang="ko-KR" altLang="en-US" sz="1000" b="1" dirty="0">
+                <a:solidFill>
+                  <a:schemeClr val="accent6">
+                    <a:lumMod val="60000"/>
+                    <a:lumOff val="40000"/>
+                  </a:schemeClr>
+                </a:solidFill>
+              </a:rPr>
+              <a:t>내가 이김</a:t>
+            </a:r>
+            <a:r>
+              <a:rPr lang="en-US" altLang="ko-KR" sz="1000" b="1" dirty="0">
+                <a:solidFill>
+                  <a:schemeClr val="accent6">
+                    <a:lumMod val="60000"/>
+                    <a:lumOff val="40000"/>
+                  </a:schemeClr>
+                </a:solidFill>
+              </a:rPr>
+              <a:t>?</a:t>
+            </a:r>
+            <a:endParaRPr lang="ko-KR" altLang="en-US" sz="1000" b="1" dirty="0">
+              <a:solidFill>
+                <a:schemeClr val="accent6">
+                  <a:lumMod val="60000"/>
+                  <a:lumOff val="40000"/>
+                </a:schemeClr>
+              </a:solidFill>
+            </a:endParaRPr>
+          </a:p>
+        </p:txBody>
+      </p:sp>
+      <p:sp>
+        <p:nvSpPr>
+          <p:cNvPr id="33" name="순서도: 처리 32">
+            <a:extLst>
+              <a:ext uri="{FF2B5EF4-FFF2-40B4-BE49-F238E27FC236}">
+                <a16:creationId xmlns:a16="http://schemas.microsoft.com/office/drawing/2014/main" id="{D89C1369-D0FD-D46B-70D5-1835AD9EF822}"/>
+              </a:ext>
+            </a:extLst>
+          </p:cNvPr>
+          <p:cNvSpPr/>
+          <p:nvPr/>
+        </p:nvSpPr>
+        <p:spPr>
+          <a:xfrm>
+            <a:off x="3257220" y="4265421"/>
+            <a:ext cx="2121717" cy="703505"/>
+          </a:xfrm>
+          <a:prstGeom prst="flowChartProcess">
+            <a:avLst/>
+          </a:prstGeom>
+        </p:spPr>
+        <p:style>
+          <a:lnRef idx="2">
+            <a:schemeClr val="accent1">
+              <a:shade val="50000"/>
+            </a:schemeClr>
+          </a:lnRef>
+          <a:fillRef idx="1">
+            <a:schemeClr val="accent1"/>
+          </a:fillRef>
+          <a:effectRef idx="0">
+            <a:schemeClr val="accent1"/>
+          </a:effectRef>
+          <a:fontRef idx="minor">
+            <a:schemeClr val="lt1"/>
+          </a:fontRef>
+        </p:style>
+        <p:txBody>
+          <a:bodyPr rtlCol="0" anchor="ctr"/>
+          <a:lstStyle/>
+          <a:p>
+            <a:pPr algn="ctr"/>
+            <a:r>
+              <a:rPr lang="ko-KR" altLang="en-US" sz="1000" b="1" dirty="0" err="1">
+                <a:solidFill>
+                  <a:srgbClr val="FFC000"/>
+                </a:solidFill>
+              </a:rPr>
+              <a:t>묵찌빠</a:t>
+            </a:r>
+            <a:r>
+              <a:rPr lang="ko-KR" altLang="en-US" sz="1000" b="1" dirty="0">
+                <a:solidFill>
+                  <a:srgbClr val="FFC000"/>
+                </a:solidFill>
+              </a:rPr>
+              <a:t> 손을 선택한다</a:t>
+            </a:r>
+            <a:r>
+              <a:rPr lang="en-US" altLang="ko-KR" sz="1000" b="1" dirty="0">
+                <a:solidFill>
+                  <a:srgbClr val="FFC000"/>
+                </a:solidFill>
+              </a:rPr>
+              <a:t>.</a:t>
+            </a:r>
+            <a:endParaRPr lang="ko-KR" altLang="en-US" sz="1000" b="1" dirty="0">
+              <a:solidFill>
+                <a:srgbClr val="FFC000"/>
+              </a:solidFill>
+            </a:endParaRPr>
+          </a:p>
+        </p:txBody>
+      </p:sp>
+      <p:sp>
+        <p:nvSpPr>
+          <p:cNvPr id="458" name="순서도: 처리 457">
+            <a:extLst>
+              <a:ext uri="{FF2B5EF4-FFF2-40B4-BE49-F238E27FC236}">
+                <a16:creationId xmlns:a16="http://schemas.microsoft.com/office/drawing/2014/main" id="{6F023899-B0CA-4455-8636-10F3294EE5CD}"/>
+              </a:ext>
+            </a:extLst>
+          </p:cNvPr>
+          <p:cNvSpPr/>
+          <p:nvPr/>
+        </p:nvSpPr>
+        <p:spPr>
+          <a:xfrm>
+            <a:off x="10056524" y="2160802"/>
+            <a:ext cx="1930800" cy="505147"/>
+          </a:xfrm>
+          <a:prstGeom prst="flowChartProcess">
+            <a:avLst/>
+          </a:prstGeom>
+        </p:spPr>
+        <p:style>
+          <a:lnRef idx="2">
+            <a:schemeClr val="accent1">
+              <a:shade val="50000"/>
+            </a:schemeClr>
+          </a:lnRef>
+          <a:fillRef idx="1">
+            <a:schemeClr val="accent1"/>
+          </a:fillRef>
+          <a:effectRef idx="0">
+            <a:schemeClr val="accent1"/>
+          </a:effectRef>
+          <a:fontRef idx="minor">
+            <a:schemeClr val="lt1"/>
+          </a:fontRef>
+        </p:style>
+        <p:txBody>
+          <a:bodyPr rtlCol="0" anchor="ctr"/>
+          <a:lstStyle/>
+          <a:p>
+            <a:pPr algn="ctr"/>
+            <a:r>
+              <a:rPr lang="ko-KR" altLang="en-US" sz="1000" b="1" dirty="0">
+                <a:solidFill>
+                  <a:srgbClr val="FFC000"/>
+                </a:solidFill>
+              </a:rPr>
+              <a:t>패배</a:t>
+            </a:r>
+            <a:endParaRPr lang="en-US" altLang="ko-KR" sz="1000" b="1" dirty="0">
+              <a:solidFill>
+                <a:srgbClr val="FFC000"/>
+              </a:solidFill>
+            </a:endParaRPr>
+          </a:p>
+        </p:txBody>
+      </p:sp>
+      <p:sp>
+        <p:nvSpPr>
+          <p:cNvPr id="463" name="순서도: 판단 462">
+            <a:extLst>
+              <a:ext uri="{FF2B5EF4-FFF2-40B4-BE49-F238E27FC236}">
+                <a16:creationId xmlns:a16="http://schemas.microsoft.com/office/drawing/2014/main" id="{873578E9-3213-9BEA-2555-1719FDC16DC7}"/>
+              </a:ext>
+            </a:extLst>
+          </p:cNvPr>
+          <p:cNvSpPr/>
+          <p:nvPr/>
+        </p:nvSpPr>
+        <p:spPr>
+          <a:xfrm>
+            <a:off x="3098670" y="6115825"/>
+            <a:ext cx="2074820" cy="703505"/>
+          </a:xfrm>
+          <a:prstGeom prst="flowChartDecision">
+            <a:avLst/>
+          </a:prstGeom>
+        </p:spPr>
+        <p:style>
+          <a:lnRef idx="2">
+            <a:schemeClr val="accent1">
+              <a:shade val="50000"/>
+            </a:schemeClr>
+          </a:lnRef>
+          <a:fillRef idx="1">
+            <a:schemeClr val="accent1"/>
+          </a:fillRef>
+          <a:effectRef idx="0">
+            <a:schemeClr val="accent1"/>
+          </a:effectRef>
+          <a:fontRef idx="minor">
+            <a:schemeClr val="lt1"/>
+          </a:fontRef>
+        </p:style>
+        <p:txBody>
+          <a:bodyPr rtlCol="0" anchor="ctr"/>
+          <a:lstStyle/>
+          <a:p>
+            <a:pPr algn="ctr"/>
+            <a:r>
+              <a:rPr lang="ko-KR" altLang="en-US" sz="1000" b="1" dirty="0">
+                <a:solidFill>
+                  <a:schemeClr val="accent6">
+                    <a:lumMod val="60000"/>
+                    <a:lumOff val="40000"/>
+                  </a:schemeClr>
+                </a:solidFill>
+              </a:rPr>
+              <a:t>한판 더</a:t>
+            </a:r>
+            <a:r>
+              <a:rPr lang="en-US" altLang="ko-KR" sz="1000" b="1" dirty="0">
+                <a:solidFill>
+                  <a:schemeClr val="accent6">
+                    <a:lumMod val="60000"/>
+                    <a:lumOff val="40000"/>
+                  </a:schemeClr>
+                </a:solidFill>
+              </a:rPr>
+              <a:t>?</a:t>
+            </a:r>
+            <a:endParaRPr lang="ko-KR" altLang="en-US" sz="1000" b="1" dirty="0">
+              <a:solidFill>
+                <a:schemeClr val="accent6">
+                  <a:lumMod val="60000"/>
+                  <a:lumOff val="40000"/>
+                </a:schemeClr>
+              </a:solidFill>
+            </a:endParaRPr>
+          </a:p>
+        </p:txBody>
+      </p:sp>
+      <p:sp>
+        <p:nvSpPr>
+          <p:cNvPr id="496" name="순서도: 처리 495">
+            <a:extLst>
+              <a:ext uri="{FF2B5EF4-FFF2-40B4-BE49-F238E27FC236}">
+                <a16:creationId xmlns:a16="http://schemas.microsoft.com/office/drawing/2014/main" id="{DB01F2FD-6194-94DB-5B86-2B6015FAA037}"/>
+              </a:ext>
+            </a:extLst>
+          </p:cNvPr>
+          <p:cNvSpPr/>
+          <p:nvPr/>
+        </p:nvSpPr>
+        <p:spPr>
+          <a:xfrm>
+            <a:off x="7176804" y="206387"/>
+            <a:ext cx="2121717" cy="703505"/>
+          </a:xfrm>
+          <a:prstGeom prst="flowChartProcess">
+            <a:avLst/>
+          </a:prstGeom>
+        </p:spPr>
+        <p:style>
+          <a:lnRef idx="2">
+            <a:schemeClr val="accent1">
+              <a:shade val="50000"/>
+            </a:schemeClr>
+          </a:lnRef>
+          <a:fillRef idx="1">
+            <a:schemeClr val="accent1"/>
+          </a:fillRef>
+          <a:effectRef idx="0">
+            <a:schemeClr val="accent1"/>
+          </a:effectRef>
+          <a:fontRef idx="minor">
+            <a:schemeClr val="lt1"/>
+          </a:fontRef>
+        </p:style>
+        <p:txBody>
+          <a:bodyPr rtlCol="0" anchor="ctr"/>
+          <a:lstStyle/>
+          <a:p>
+            <a:pPr algn="ctr"/>
+            <a:r>
+              <a:rPr lang="ko-KR" altLang="en-US" sz="1000" b="1" dirty="0" err="1">
+                <a:solidFill>
+                  <a:srgbClr val="FFC000"/>
+                </a:solidFill>
+              </a:rPr>
+              <a:t>묵찌빠</a:t>
+            </a:r>
+            <a:r>
+              <a:rPr lang="ko-KR" altLang="en-US" sz="1000" b="1" dirty="0">
+                <a:solidFill>
+                  <a:srgbClr val="FFC000"/>
+                </a:solidFill>
+              </a:rPr>
+              <a:t> 손을 선택한다</a:t>
+            </a:r>
+            <a:r>
+              <a:rPr lang="en-US" altLang="ko-KR" sz="1000" b="1" dirty="0">
+                <a:solidFill>
+                  <a:srgbClr val="FFC000"/>
+                </a:solidFill>
+              </a:rPr>
+              <a:t>.</a:t>
+            </a:r>
+            <a:endParaRPr lang="ko-KR" altLang="en-US" sz="1000" b="1" dirty="0">
+              <a:solidFill>
+                <a:srgbClr val="FFC000"/>
+              </a:solidFill>
+            </a:endParaRPr>
+          </a:p>
+        </p:txBody>
+      </p:sp>
       <p:cxnSp>
         <p:nvCxnSpPr>
-          <p:cNvPr id="453" name="직선 화살표 연결선 452">
-            <a:extLst>
-              <a:ext uri="{FF2B5EF4-FFF2-40B4-BE49-F238E27FC236}">
-                <a16:creationId xmlns:a16="http://schemas.microsoft.com/office/drawing/2014/main" id="{0683745D-2A9A-4FDC-AE28-85A05CF563C9}"/>
+          <p:cNvPr id="111" name="직선 화살표 연결선 50">
+            <a:extLst>
+              <a:ext uri="{FF2B5EF4-FFF2-40B4-BE49-F238E27FC236}">
+                <a16:creationId xmlns:a16="http://schemas.microsoft.com/office/drawing/2014/main" id="{1E269488-C299-8B1E-41F7-727441AD70A3}"/>
               </a:ext>
             </a:extLst>
           </p:cNvPr>
           <p:cNvCxnSpPr>
             <a:cxnSpLocks/>
-            <a:stCxn id="399" idx="3"/>
-            <a:endCxn id="107" idx="1"/>
+            <a:stCxn id="485" idx="0"/>
+          </p:cNvCxnSpPr>
+          <p:nvPr/>
+        </p:nvCxnSpPr>
+        <p:spPr>
+          <a:xfrm rot="16200000" flipV="1">
+            <a:off x="5310168" y="2219752"/>
+            <a:ext cx="1918150" cy="1338858"/>
+          </a:xfrm>
+          <a:prstGeom prst="bentConnector3">
+            <a:avLst>
+              <a:gd name="adj1" fmla="val 99888"/>
+            </a:avLst>
+          </a:prstGeom>
+          <a:ln>
+            <a:tailEnd type="triangle"/>
+          </a:ln>
+        </p:spPr>
+        <p:style>
+          <a:lnRef idx="3">
+            <a:schemeClr val="accent1"/>
+          </a:lnRef>
+          <a:fillRef idx="0">
+            <a:schemeClr val="accent1"/>
+          </a:fillRef>
+          <a:effectRef idx="2">
+            <a:schemeClr val="accent1"/>
+          </a:effectRef>
+          <a:fontRef idx="minor">
+            <a:schemeClr val="tx1"/>
+          </a:fontRef>
+        </p:style>
+      </p:cxnSp>
+      <p:cxnSp>
+        <p:nvCxnSpPr>
+          <p:cNvPr id="122" name="직선 화살표 연결선 121">
+            <a:extLst>
+              <a:ext uri="{FF2B5EF4-FFF2-40B4-BE49-F238E27FC236}">
+                <a16:creationId xmlns:a16="http://schemas.microsoft.com/office/drawing/2014/main" id="{0412E512-C27B-DD25-646A-DE05D33E4106}"/>
+              </a:ext>
+            </a:extLst>
+          </p:cNvPr>
+          <p:cNvCxnSpPr>
+            <a:cxnSpLocks/>
+            <a:stCxn id="407" idx="3"/>
+            <a:endCxn id="412" idx="1"/>
           </p:cNvCxnSpPr>
           <p:nvPr/>
         </p:nvCxnSpPr>
         <p:spPr>
           <a:xfrm flipV="1">
-            <a:off x="2845637" y="5708493"/>
-            <a:ext cx="3372988" cy="1"/>
+            <a:off x="7976082" y="5260729"/>
+            <a:ext cx="354757" cy="3122"/>
+          </a:xfrm>
+          <a:prstGeom prst="straightConnector1">
+            <a:avLst/>
+          </a:prstGeom>
+          <a:ln>
+            <a:tailEnd type="triangle"/>
+          </a:ln>
+        </p:spPr>
+        <p:style>
+          <a:lnRef idx="3">
+            <a:schemeClr val="accent1"/>
+          </a:lnRef>
+          <a:fillRef idx="0">
+            <a:schemeClr val="accent1"/>
+          </a:fillRef>
+          <a:effectRef idx="2">
+            <a:schemeClr val="accent1"/>
+          </a:effectRef>
+          <a:fontRef idx="minor">
+            <a:schemeClr val="tx1"/>
+          </a:fontRef>
+        </p:style>
+      </p:cxnSp>
+      <p:cxnSp>
+        <p:nvCxnSpPr>
+          <p:cNvPr id="126" name="직선 화살표 연결선 125">
+            <a:extLst>
+              <a:ext uri="{FF2B5EF4-FFF2-40B4-BE49-F238E27FC236}">
+                <a16:creationId xmlns:a16="http://schemas.microsoft.com/office/drawing/2014/main" id="{DB7EB2C8-0B7A-2C09-3754-68D0E823127E}"/>
+              </a:ext>
+            </a:extLst>
+          </p:cNvPr>
+          <p:cNvCxnSpPr>
+            <a:cxnSpLocks/>
+            <a:stCxn id="407" idx="0"/>
+            <a:endCxn id="485" idx="2"/>
+          </p:cNvCxnSpPr>
+          <p:nvPr/>
+        </p:nvCxnSpPr>
+        <p:spPr>
+          <a:xfrm flipV="1">
+            <a:off x="6938672" y="4551761"/>
+            <a:ext cx="0" cy="360337"/>
+          </a:xfrm>
+          <a:prstGeom prst="straightConnector1">
+            <a:avLst/>
+          </a:prstGeom>
+          <a:ln>
+            <a:solidFill>
+              <a:srgbClr val="FF0000"/>
+            </a:solidFill>
+            <a:tailEnd type="triangle"/>
+          </a:ln>
+        </p:spPr>
+        <p:style>
+          <a:lnRef idx="3">
+            <a:schemeClr val="accent2"/>
+          </a:lnRef>
+          <a:fillRef idx="0">
+            <a:schemeClr val="accent2"/>
+          </a:fillRef>
+          <a:effectRef idx="2">
+            <a:schemeClr val="accent2"/>
+          </a:effectRef>
+          <a:fontRef idx="minor">
+            <a:schemeClr val="tx1"/>
+          </a:fontRef>
+        </p:style>
+      </p:cxnSp>
+      <p:cxnSp>
+        <p:nvCxnSpPr>
+          <p:cNvPr id="516" name="직선 화살표 연결선 515">
+            <a:extLst>
+              <a:ext uri="{FF2B5EF4-FFF2-40B4-BE49-F238E27FC236}">
+                <a16:creationId xmlns:a16="http://schemas.microsoft.com/office/drawing/2014/main" id="{179D012B-134F-F1F8-5003-7FE8A6AE82A6}"/>
+              </a:ext>
+            </a:extLst>
+          </p:cNvPr>
+          <p:cNvCxnSpPr>
+            <a:cxnSpLocks/>
+            <a:stCxn id="388" idx="2"/>
+            <a:endCxn id="33" idx="0"/>
+          </p:cNvCxnSpPr>
+          <p:nvPr/>
+        </p:nvCxnSpPr>
+        <p:spPr>
+          <a:xfrm>
+            <a:off x="4318079" y="3792709"/>
+            <a:ext cx="0" cy="472712"/>
           </a:xfrm>
           <a:prstGeom prst="straightConnector1">
             <a:avLst/>
@@ -4931,27 +5560,29 @@
       </p:cxnSp>
       <p:cxnSp>
         <p:nvCxnSpPr>
-          <p:cNvPr id="457" name="직선 화살표 연결선 456">
-            <a:extLst>
-              <a:ext uri="{FF2B5EF4-FFF2-40B4-BE49-F238E27FC236}">
-                <a16:creationId xmlns:a16="http://schemas.microsoft.com/office/drawing/2014/main" id="{E132BD78-3A34-4C08-AE86-395A7859B69D}"/>
+          <p:cNvPr id="519" name="직선 화살표 연결선 518">
+            <a:extLst>
+              <a:ext uri="{FF2B5EF4-FFF2-40B4-BE49-F238E27FC236}">
+                <a16:creationId xmlns:a16="http://schemas.microsoft.com/office/drawing/2014/main" id="{CC0D4953-5F4E-833E-4CAB-7CE98B2E7D74}"/>
               </a:ext>
             </a:extLst>
           </p:cNvPr>
           <p:cNvCxnSpPr>
             <a:cxnSpLocks/>
-            <a:stCxn id="412" idx="2"/>
-            <a:endCxn id="107" idx="0"/>
+            <a:stCxn id="33" idx="3"/>
+            <a:endCxn id="407" idx="1"/>
           </p:cNvCxnSpPr>
           <p:nvPr/>
         </p:nvCxnSpPr>
         <p:spPr>
           <a:xfrm>
-            <a:off x="7133410" y="5006147"/>
-            <a:ext cx="0" cy="490480"/>
+            <a:off x="5378937" y="4617174"/>
+            <a:ext cx="522325" cy="646677"/>
           </a:xfrm>
-          <a:prstGeom prst="straightConnector1">
-            <a:avLst/>
+          <a:prstGeom prst="bentConnector3">
+            <a:avLst>
+              <a:gd name="adj1" fmla="val 50000"/>
+            </a:avLst>
           </a:prstGeom>
           <a:ln>
             <a:tailEnd type="triangle"/>
@@ -4972,555 +5603,30 @@
           </a:fontRef>
         </p:style>
       </p:cxnSp>
-      <p:sp>
-        <p:nvSpPr>
-          <p:cNvPr id="464" name="TextBox 463">
-            <a:extLst>
-              <a:ext uri="{FF2B5EF4-FFF2-40B4-BE49-F238E27FC236}">
-                <a16:creationId xmlns:a16="http://schemas.microsoft.com/office/drawing/2014/main" id="{5443C906-8797-4566-9EA1-54968D3E668B}"/>
-              </a:ext>
-            </a:extLst>
-          </p:cNvPr>
-          <p:cNvSpPr txBox="1"/>
-          <p:nvPr/>
-        </p:nvSpPr>
-        <p:spPr>
-          <a:xfrm flipH="1">
-            <a:off x="4377175" y="5309441"/>
-            <a:ext cx="318004" cy="246220"/>
-          </a:xfrm>
-          <a:prstGeom prst="rect">
-            <a:avLst/>
-          </a:prstGeom>
-          <a:noFill/>
-        </p:spPr>
-        <p:txBody>
-          <a:bodyPr wrap="square" rtlCol="0">
-            <a:spAutoFit/>
-          </a:bodyPr>
-          <a:lstStyle/>
-          <a:p>
-            <a:pPr algn="ctr"/>
-            <a:r>
-              <a:rPr lang="ko-KR" altLang="en-US" sz="1000" dirty="0"/>
-              <a:t>예</a:t>
-            </a:r>
-          </a:p>
-        </p:txBody>
-      </p:sp>
-      <p:sp>
-        <p:nvSpPr>
-          <p:cNvPr id="465" name="TextBox 464">
-            <a:extLst>
-              <a:ext uri="{FF2B5EF4-FFF2-40B4-BE49-F238E27FC236}">
-                <a16:creationId xmlns:a16="http://schemas.microsoft.com/office/drawing/2014/main" id="{E29D2CE0-42AE-4462-A3B6-BD2F9FEF3155}"/>
-              </a:ext>
-            </a:extLst>
-          </p:cNvPr>
-          <p:cNvSpPr txBox="1"/>
-          <p:nvPr/>
-        </p:nvSpPr>
-        <p:spPr>
-          <a:xfrm>
-            <a:off x="7053783" y="4096939"/>
-            <a:ext cx="318005" cy="246221"/>
-          </a:xfrm>
-          <a:prstGeom prst="rect">
-            <a:avLst/>
-          </a:prstGeom>
-          <a:noFill/>
-        </p:spPr>
-        <p:txBody>
-          <a:bodyPr wrap="square" rtlCol="0">
-            <a:spAutoFit/>
-          </a:bodyPr>
-          <a:lstStyle/>
-          <a:p>
-            <a:pPr algn="ctr"/>
-            <a:r>
-              <a:rPr lang="ko-KR" altLang="en-US" sz="1000" dirty="0"/>
-              <a:t>예</a:t>
-            </a:r>
-          </a:p>
-        </p:txBody>
-      </p:sp>
-      <p:sp>
-        <p:nvSpPr>
-          <p:cNvPr id="467" name="TextBox 466">
-            <a:extLst>
-              <a:ext uri="{FF2B5EF4-FFF2-40B4-BE49-F238E27FC236}">
-                <a16:creationId xmlns:a16="http://schemas.microsoft.com/office/drawing/2014/main" id="{5C60D09F-680A-401D-BFF4-CF00D4FBB4BE}"/>
-              </a:ext>
-            </a:extLst>
-          </p:cNvPr>
-          <p:cNvSpPr txBox="1"/>
-          <p:nvPr/>
-        </p:nvSpPr>
-        <p:spPr>
-          <a:xfrm>
-            <a:off x="4054375" y="2886531"/>
-            <a:ext cx="318005" cy="246221"/>
-          </a:xfrm>
-          <a:prstGeom prst="rect">
-            <a:avLst/>
-          </a:prstGeom>
-          <a:noFill/>
-        </p:spPr>
-        <p:txBody>
-          <a:bodyPr wrap="square" rtlCol="0">
-            <a:spAutoFit/>
-          </a:bodyPr>
-          <a:lstStyle/>
-          <a:p>
-            <a:pPr algn="ctr"/>
-            <a:r>
-              <a:rPr lang="ko-KR" altLang="en-US" sz="1000" dirty="0"/>
-              <a:t>예</a:t>
-            </a:r>
-          </a:p>
-        </p:txBody>
-      </p:sp>
-      <p:sp>
-        <p:nvSpPr>
-          <p:cNvPr id="468" name="TextBox 467">
-            <a:extLst>
-              <a:ext uri="{FF2B5EF4-FFF2-40B4-BE49-F238E27FC236}">
-                <a16:creationId xmlns:a16="http://schemas.microsoft.com/office/drawing/2014/main" id="{FC409F8D-4C04-4FAA-AC9B-0AC0E27C0383}"/>
-              </a:ext>
-            </a:extLst>
-          </p:cNvPr>
-          <p:cNvSpPr txBox="1"/>
-          <p:nvPr/>
-        </p:nvSpPr>
-        <p:spPr>
-          <a:xfrm>
-            <a:off x="4401179" y="4080056"/>
-            <a:ext cx="588000" cy="246221"/>
-          </a:xfrm>
-          <a:prstGeom prst="rect">
-            <a:avLst/>
-          </a:prstGeom>
-          <a:noFill/>
-        </p:spPr>
-        <p:txBody>
-          <a:bodyPr wrap="square" rtlCol="0">
-            <a:spAutoFit/>
-          </a:bodyPr>
-          <a:lstStyle/>
-          <a:p>
-            <a:r>
-              <a:rPr lang="ko-KR" altLang="en-US" sz="1000" dirty="0" err="1"/>
-              <a:t>아니오</a:t>
-            </a:r>
-            <a:endParaRPr lang="ko-KR" altLang="en-US" sz="1000" dirty="0"/>
-          </a:p>
-        </p:txBody>
-      </p:sp>
-      <p:sp>
-        <p:nvSpPr>
-          <p:cNvPr id="469" name="TextBox 468">
-            <a:extLst>
-              <a:ext uri="{FF2B5EF4-FFF2-40B4-BE49-F238E27FC236}">
-                <a16:creationId xmlns:a16="http://schemas.microsoft.com/office/drawing/2014/main" id="{E2A60DEC-BD9A-4BA6-A55D-EE54B1FF95D2}"/>
-              </a:ext>
-            </a:extLst>
-          </p:cNvPr>
-          <p:cNvSpPr txBox="1"/>
-          <p:nvPr/>
-        </p:nvSpPr>
-        <p:spPr>
-          <a:xfrm>
-            <a:off x="2867307" y="4515371"/>
-            <a:ext cx="588000" cy="246221"/>
-          </a:xfrm>
-          <a:prstGeom prst="rect">
-            <a:avLst/>
-          </a:prstGeom>
-          <a:noFill/>
-        </p:spPr>
-        <p:txBody>
-          <a:bodyPr wrap="square" rtlCol="0">
-            <a:spAutoFit/>
-          </a:bodyPr>
-          <a:lstStyle/>
-          <a:p>
-            <a:r>
-              <a:rPr lang="ko-KR" altLang="en-US" sz="1000" dirty="0" err="1"/>
-              <a:t>아니오</a:t>
-            </a:r>
-            <a:endParaRPr lang="ko-KR" altLang="en-US" sz="1000" dirty="0"/>
-          </a:p>
-        </p:txBody>
-      </p:sp>
-      <p:sp>
-        <p:nvSpPr>
-          <p:cNvPr id="470" name="TextBox 469">
-            <a:extLst>
-              <a:ext uri="{FF2B5EF4-FFF2-40B4-BE49-F238E27FC236}">
-                <a16:creationId xmlns:a16="http://schemas.microsoft.com/office/drawing/2014/main" id="{D8DF44E9-6BB2-4AD1-A1C3-E5C7ADCD763C}"/>
-              </a:ext>
-            </a:extLst>
-          </p:cNvPr>
-          <p:cNvSpPr txBox="1"/>
-          <p:nvPr/>
-        </p:nvSpPr>
-        <p:spPr>
-          <a:xfrm>
-            <a:off x="2790758" y="2151627"/>
-            <a:ext cx="588000" cy="246221"/>
-          </a:xfrm>
-          <a:prstGeom prst="rect">
-            <a:avLst/>
-          </a:prstGeom>
-          <a:noFill/>
-        </p:spPr>
-        <p:txBody>
-          <a:bodyPr wrap="square" rtlCol="0">
-            <a:spAutoFit/>
-          </a:bodyPr>
-          <a:lstStyle/>
-          <a:p>
-            <a:r>
-              <a:rPr lang="ko-KR" altLang="en-US" sz="1000" dirty="0" err="1"/>
-              <a:t>아니오</a:t>
-            </a:r>
-            <a:endParaRPr lang="ko-KR" altLang="en-US" sz="1000" dirty="0"/>
-          </a:p>
-        </p:txBody>
-      </p:sp>
-      <p:sp>
-        <p:nvSpPr>
-          <p:cNvPr id="471" name="TextBox 470">
-            <a:extLst>
-              <a:ext uri="{FF2B5EF4-FFF2-40B4-BE49-F238E27FC236}">
-                <a16:creationId xmlns:a16="http://schemas.microsoft.com/office/drawing/2014/main" id="{73C41714-D187-4D3D-A74F-B8507FF4E68C}"/>
-              </a:ext>
-            </a:extLst>
-          </p:cNvPr>
-          <p:cNvSpPr txBox="1"/>
-          <p:nvPr/>
-        </p:nvSpPr>
-        <p:spPr>
-          <a:xfrm>
-            <a:off x="4242177" y="1740303"/>
-            <a:ext cx="588000" cy="246221"/>
-          </a:xfrm>
-          <a:prstGeom prst="rect">
-            <a:avLst/>
-          </a:prstGeom>
-          <a:noFill/>
-        </p:spPr>
-        <p:txBody>
-          <a:bodyPr wrap="square" rtlCol="0">
-            <a:spAutoFit/>
-          </a:bodyPr>
-          <a:lstStyle/>
-          <a:p>
-            <a:r>
-              <a:rPr lang="ko-KR" altLang="en-US" sz="1000" dirty="0" err="1"/>
-              <a:t>아니오</a:t>
-            </a:r>
-            <a:endParaRPr lang="ko-KR" altLang="en-US" sz="1000" dirty="0"/>
-          </a:p>
-        </p:txBody>
-      </p:sp>
-      <p:sp>
-        <p:nvSpPr>
-          <p:cNvPr id="472" name="TextBox 471">
-            <a:extLst>
-              <a:ext uri="{FF2B5EF4-FFF2-40B4-BE49-F238E27FC236}">
-                <a16:creationId xmlns:a16="http://schemas.microsoft.com/office/drawing/2014/main" id="{7D047BAE-2FEE-4609-96FF-323B5FCDD260}"/>
-              </a:ext>
-            </a:extLst>
-          </p:cNvPr>
-          <p:cNvSpPr txBox="1"/>
-          <p:nvPr/>
-        </p:nvSpPr>
-        <p:spPr>
-          <a:xfrm>
-            <a:off x="7083679" y="2461867"/>
-            <a:ext cx="588000" cy="246221"/>
-          </a:xfrm>
-          <a:prstGeom prst="rect">
-            <a:avLst/>
-          </a:prstGeom>
-          <a:noFill/>
-        </p:spPr>
-        <p:txBody>
-          <a:bodyPr wrap="square" rtlCol="0">
-            <a:spAutoFit/>
-          </a:bodyPr>
-          <a:lstStyle/>
-          <a:p>
-            <a:r>
-              <a:rPr lang="ko-KR" altLang="en-US" sz="1000" dirty="0" err="1"/>
-              <a:t>아니오</a:t>
-            </a:r>
-            <a:endParaRPr lang="ko-KR" altLang="en-US" sz="1000" dirty="0"/>
-          </a:p>
-        </p:txBody>
-      </p:sp>
-      <p:sp>
-        <p:nvSpPr>
-          <p:cNvPr id="473" name="TextBox 472">
-            <a:extLst>
-              <a:ext uri="{FF2B5EF4-FFF2-40B4-BE49-F238E27FC236}">
-                <a16:creationId xmlns:a16="http://schemas.microsoft.com/office/drawing/2014/main" id="{6A068873-BD91-4583-8E6B-166409285B76}"/>
-              </a:ext>
-            </a:extLst>
-          </p:cNvPr>
-          <p:cNvSpPr txBox="1"/>
-          <p:nvPr/>
-        </p:nvSpPr>
-        <p:spPr>
-          <a:xfrm>
-            <a:off x="1808228" y="2879435"/>
-            <a:ext cx="318005" cy="246221"/>
-          </a:xfrm>
-          <a:prstGeom prst="rect">
-            <a:avLst/>
-          </a:prstGeom>
-          <a:noFill/>
-        </p:spPr>
-        <p:txBody>
-          <a:bodyPr wrap="square" rtlCol="0">
-            <a:spAutoFit/>
-          </a:bodyPr>
-          <a:lstStyle/>
-          <a:p>
-            <a:pPr algn="ctr"/>
-            <a:r>
-              <a:rPr lang="ko-KR" altLang="en-US" sz="1000" dirty="0"/>
-              <a:t>예</a:t>
-            </a:r>
-          </a:p>
-        </p:txBody>
-      </p:sp>
-      <p:sp>
-        <p:nvSpPr>
-          <p:cNvPr id="474" name="TextBox 473">
-            <a:extLst>
-              <a:ext uri="{FF2B5EF4-FFF2-40B4-BE49-F238E27FC236}">
-                <a16:creationId xmlns:a16="http://schemas.microsoft.com/office/drawing/2014/main" id="{586457A1-70D1-4B2D-9DD1-7534C12062BD}"/>
-              </a:ext>
-            </a:extLst>
-          </p:cNvPr>
-          <p:cNvSpPr txBox="1"/>
-          <p:nvPr/>
-        </p:nvSpPr>
-        <p:spPr>
-          <a:xfrm>
-            <a:off x="1808228" y="5128276"/>
-            <a:ext cx="318005" cy="246221"/>
-          </a:xfrm>
-          <a:prstGeom prst="rect">
-            <a:avLst/>
-          </a:prstGeom>
-          <a:noFill/>
-        </p:spPr>
-        <p:txBody>
-          <a:bodyPr wrap="square" rtlCol="0">
-            <a:spAutoFit/>
-          </a:bodyPr>
-          <a:lstStyle/>
-          <a:p>
-            <a:pPr algn="ctr"/>
-            <a:r>
-              <a:rPr lang="ko-KR" altLang="en-US" sz="1000" dirty="0"/>
-              <a:t>예</a:t>
-            </a:r>
-          </a:p>
-        </p:txBody>
-      </p:sp>
       <p:cxnSp>
         <p:nvCxnSpPr>
-          <p:cNvPr id="475" name="직선 화살표 연결선 474">
-            <a:extLst>
-              <a:ext uri="{FF2B5EF4-FFF2-40B4-BE49-F238E27FC236}">
-                <a16:creationId xmlns:a16="http://schemas.microsoft.com/office/drawing/2014/main" id="{3897E852-D424-4D7E-834E-791546575837}"/>
+          <p:cNvPr id="527" name="직선 화살표 연결선 526">
+            <a:extLst>
+              <a:ext uri="{FF2B5EF4-FFF2-40B4-BE49-F238E27FC236}">
+                <a16:creationId xmlns:a16="http://schemas.microsoft.com/office/drawing/2014/main" id="{3C2310D6-DB7A-26AD-7E3E-2F1E427F1E7D}"/>
               </a:ext>
             </a:extLst>
           </p:cNvPr>
           <p:cNvCxnSpPr>
             <a:cxnSpLocks/>
-            <a:stCxn id="389" idx="3"/>
-            <a:endCxn id="407" idx="1"/>
+            <a:stCxn id="485" idx="1"/>
+            <a:endCxn id="388" idx="3"/>
           </p:cNvCxnSpPr>
           <p:nvPr/>
         </p:nvCxnSpPr>
         <p:spPr>
-          <a:xfrm flipV="1">
-            <a:off x="5350135" y="3640236"/>
-            <a:ext cx="745865" cy="7066"/>
-          </a:xfrm>
-          <a:prstGeom prst="straightConnector1">
-            <a:avLst/>
-          </a:prstGeom>
-          <a:ln>
-            <a:tailEnd type="triangle"/>
-          </a:ln>
-        </p:spPr>
-        <p:style>
-          <a:lnRef idx="3">
-            <a:schemeClr val="dk1"/>
-          </a:lnRef>
-          <a:fillRef idx="0">
-            <a:schemeClr val="dk1"/>
-          </a:fillRef>
-          <a:effectRef idx="2">
-            <a:schemeClr val="dk1"/>
-          </a:effectRef>
-          <a:fontRef idx="minor">
-            <a:schemeClr val="tx1"/>
-          </a:fontRef>
-        </p:style>
-      </p:cxnSp>
-      <p:sp>
-        <p:nvSpPr>
-          <p:cNvPr id="485" name="순서도: 판단 484">
-            <a:extLst>
-              <a:ext uri="{FF2B5EF4-FFF2-40B4-BE49-F238E27FC236}">
-                <a16:creationId xmlns:a16="http://schemas.microsoft.com/office/drawing/2014/main" id="{6A6EFADE-9B50-4175-8E89-B0763EFF2B03}"/>
-              </a:ext>
-            </a:extLst>
-          </p:cNvPr>
-          <p:cNvSpPr/>
-          <p:nvPr/>
-        </p:nvSpPr>
-        <p:spPr>
-          <a:xfrm>
-            <a:off x="6109472" y="1198936"/>
-            <a:ext cx="2047875" cy="703505"/>
-          </a:xfrm>
-          <a:prstGeom prst="flowChartDecision">
-            <a:avLst/>
-          </a:prstGeom>
-        </p:spPr>
-        <p:style>
-          <a:lnRef idx="2">
-            <a:schemeClr val="accent1">
-              <a:shade val="50000"/>
-            </a:schemeClr>
-          </a:lnRef>
-          <a:fillRef idx="1">
-            <a:schemeClr val="accent1"/>
-          </a:fillRef>
-          <a:effectRef idx="0">
-            <a:schemeClr val="accent1"/>
-          </a:effectRef>
-          <a:fontRef idx="minor">
-            <a:schemeClr val="lt1"/>
-          </a:fontRef>
-        </p:style>
-        <p:txBody>
-          <a:bodyPr rtlCol="0" anchor="ctr"/>
-          <a:lstStyle/>
-          <a:p>
-            <a:pPr algn="ctr"/>
-            <a:r>
-              <a:rPr lang="ko-KR" altLang="en-US" sz="1000" b="1" dirty="0">
-                <a:solidFill>
-                  <a:schemeClr val="accent6">
-                    <a:lumMod val="60000"/>
-                    <a:lumOff val="40000"/>
-                  </a:schemeClr>
-                </a:solidFill>
-              </a:rPr>
-              <a:t>손 모양이 이겼는가</a:t>
-            </a:r>
-            <a:r>
-              <a:rPr lang="en-US" altLang="ko-KR" sz="1000" b="1" dirty="0">
-                <a:solidFill>
-                  <a:schemeClr val="accent6">
-                    <a:lumMod val="60000"/>
-                    <a:lumOff val="40000"/>
-                  </a:schemeClr>
-                </a:solidFill>
-              </a:rPr>
-              <a:t>?</a:t>
-            </a:r>
-            <a:endParaRPr lang="ko-KR" altLang="en-US" sz="1000" b="1" dirty="0">
-              <a:solidFill>
-                <a:schemeClr val="accent6">
-                  <a:lumMod val="60000"/>
-                  <a:lumOff val="40000"/>
-                </a:schemeClr>
-              </a:solidFill>
-            </a:endParaRPr>
-          </a:p>
-        </p:txBody>
-      </p:sp>
-      <p:cxnSp>
-        <p:nvCxnSpPr>
-          <p:cNvPr id="488" name="직선 화살표 연결선 49">
-            <a:extLst>
-              <a:ext uri="{FF2B5EF4-FFF2-40B4-BE49-F238E27FC236}">
-                <a16:creationId xmlns:a16="http://schemas.microsoft.com/office/drawing/2014/main" id="{C696184F-8940-45FD-A71F-577D1A917493}"/>
-              </a:ext>
-            </a:extLst>
-          </p:cNvPr>
-          <p:cNvCxnSpPr>
-            <a:cxnSpLocks/>
-            <a:stCxn id="485" idx="0"/>
-          </p:cNvCxnSpPr>
-          <p:nvPr/>
-        </p:nvCxnSpPr>
-        <p:spPr>
-          <a:xfrm rot="16200000" flipH="1" flipV="1">
-            <a:off x="3594216" y="-515044"/>
-            <a:ext cx="1825215" cy="5253173"/>
-          </a:xfrm>
-          <a:prstGeom prst="bentConnector4">
-            <a:avLst>
-              <a:gd name="adj1" fmla="val -58878"/>
-              <a:gd name="adj2" fmla="val 124329"/>
-            </a:avLst>
-          </a:prstGeom>
-          <a:ln>
-            <a:solidFill>
-              <a:schemeClr val="accent1"/>
-            </a:solidFill>
-            <a:tailEnd type="triangle"/>
-          </a:ln>
-        </p:spPr>
-        <p:style>
-          <a:lnRef idx="3">
-            <a:schemeClr val="accent2"/>
-          </a:lnRef>
-          <a:fillRef idx="0">
-            <a:schemeClr val="accent2"/>
-          </a:fillRef>
-          <a:effectRef idx="2">
-            <a:schemeClr val="accent2"/>
-          </a:effectRef>
-          <a:fontRef idx="minor">
-            <a:schemeClr val="tx1"/>
-          </a:fontRef>
-        </p:style>
-      </p:cxnSp>
-      <p:cxnSp>
-        <p:nvCxnSpPr>
-          <p:cNvPr id="498" name="직선 화살표 연결선 412">
-            <a:extLst>
-              <a:ext uri="{FF2B5EF4-FFF2-40B4-BE49-F238E27FC236}">
-                <a16:creationId xmlns:a16="http://schemas.microsoft.com/office/drawing/2014/main" id="{ECB3ADCB-6697-4CAA-AB7E-F3A2E780B10D}"/>
-              </a:ext>
-            </a:extLst>
-          </p:cNvPr>
-          <p:cNvCxnSpPr>
-            <a:cxnSpLocks/>
-            <a:stCxn id="485" idx="1"/>
-          </p:cNvCxnSpPr>
-          <p:nvPr/>
-        </p:nvCxnSpPr>
-        <p:spPr>
-          <a:xfrm rot="10800000" flipV="1">
-            <a:off x="4308558" y="1550688"/>
-            <a:ext cx="1800915" cy="1495259"/>
+          <a:xfrm rot="10800000">
+            <a:off x="5378938" y="3440957"/>
+            <a:ext cx="542903" cy="759052"/>
           </a:xfrm>
           <a:prstGeom prst="bentConnector3">
             <a:avLst>
-              <a:gd name="adj1" fmla="val 35290"/>
+              <a:gd name="adj1" fmla="val 50000"/>
             </a:avLst>
           </a:prstGeom>
           <a:ln>
@@ -5545,42 +5651,599 @@
           </a:fontRef>
         </p:style>
       </p:cxnSp>
-      <p:sp>
-        <p:nvSpPr>
-          <p:cNvPr id="515" name="TextBox 514">
-            <a:extLst>
-              <a:ext uri="{FF2B5EF4-FFF2-40B4-BE49-F238E27FC236}">
-                <a16:creationId xmlns:a16="http://schemas.microsoft.com/office/drawing/2014/main" id="{596ECA42-2181-43C2-AE95-23C322BD0673}"/>
-              </a:ext>
-            </a:extLst>
-          </p:cNvPr>
-          <p:cNvSpPr txBox="1"/>
+      <p:cxnSp>
+        <p:nvCxnSpPr>
+          <p:cNvPr id="530" name="직선 화살표 연결선 529">
+            <a:extLst>
+              <a:ext uri="{FF2B5EF4-FFF2-40B4-BE49-F238E27FC236}">
+                <a16:creationId xmlns:a16="http://schemas.microsoft.com/office/drawing/2014/main" id="{2B94D3CA-EFD6-9FCB-701F-FF20E43AA920}"/>
+              </a:ext>
+            </a:extLst>
+          </p:cNvPr>
+          <p:cNvCxnSpPr>
+            <a:cxnSpLocks/>
+            <a:stCxn id="389" idx="3"/>
+            <a:endCxn id="496" idx="1"/>
+          </p:cNvCxnSpPr>
+          <p:nvPr/>
+        </p:nvCxnSpPr>
+        <p:spPr>
+          <a:xfrm flipV="1">
+            <a:off x="6469726" y="558140"/>
+            <a:ext cx="707078" cy="7482"/>
+          </a:xfrm>
+          <a:prstGeom prst="straightConnector1">
+            <a:avLst/>
+          </a:prstGeom>
+          <a:ln>
+            <a:tailEnd type="triangle"/>
+          </a:ln>
+        </p:spPr>
+        <p:style>
+          <a:lnRef idx="3">
+            <a:schemeClr val="dk1"/>
+          </a:lnRef>
+          <a:fillRef idx="0">
+            <a:schemeClr val="dk1"/>
+          </a:fillRef>
+          <a:effectRef idx="2">
+            <a:schemeClr val="dk1"/>
+          </a:effectRef>
+          <a:fontRef idx="minor">
+            <a:schemeClr val="tx1"/>
+          </a:fontRef>
+        </p:style>
+      </p:cxnSp>
+      <p:sp>
+        <p:nvSpPr>
+          <p:cNvPr id="537" name="순서도: 판단 536">
+            <a:extLst>
+              <a:ext uri="{FF2B5EF4-FFF2-40B4-BE49-F238E27FC236}">
+                <a16:creationId xmlns:a16="http://schemas.microsoft.com/office/drawing/2014/main" id="{8528470A-5993-62DF-015F-92346AA9D372}"/>
+              </a:ext>
+            </a:extLst>
+          </p:cNvPr>
+          <p:cNvSpPr/>
           <p:nvPr/>
         </p:nvSpPr>
         <p:spPr>
           <a:xfrm>
-            <a:off x="5452841" y="1308156"/>
-            <a:ext cx="588000" cy="246221"/>
+            <a:off x="9156263" y="1146341"/>
+            <a:ext cx="2074820" cy="703505"/>
           </a:xfrm>
-          <a:prstGeom prst="rect">
+          <a:prstGeom prst="flowChartDecision">
             <a:avLst/>
           </a:prstGeom>
-          <a:noFill/>
         </p:spPr>
-        <p:txBody>
-          <a:bodyPr wrap="square" rtlCol="0">
-            <a:spAutoFit/>
-          </a:bodyPr>
+        <p:style>
+          <a:lnRef idx="2">
+            <a:schemeClr val="accent1">
+              <a:shade val="50000"/>
+            </a:schemeClr>
+          </a:lnRef>
+          <a:fillRef idx="1">
+            <a:schemeClr val="accent1"/>
+          </a:fillRef>
+          <a:effectRef idx="0">
+            <a:schemeClr val="accent1"/>
+          </a:effectRef>
+          <a:fontRef idx="minor">
+            <a:schemeClr val="lt1"/>
+          </a:fontRef>
+        </p:style>
+        <p:txBody>
+          <a:bodyPr rtlCol="0" anchor="ctr"/>
           <a:lstStyle/>
           <a:p>
-            <a:r>
-              <a:rPr lang="ko-KR" altLang="en-US" sz="1000" dirty="0" err="1"/>
-              <a:t>아니오</a:t>
-            </a:r>
-            <a:endParaRPr lang="ko-KR" altLang="en-US" sz="1000" dirty="0"/>
-          </a:p>
-        </p:txBody>
-      </p:sp>
+            <a:pPr algn="ctr"/>
+            <a:r>
+              <a:rPr lang="ko-KR" altLang="en-US" sz="1000" b="1" dirty="0">
+                <a:solidFill>
+                  <a:schemeClr val="accent6">
+                    <a:lumMod val="60000"/>
+                    <a:lumOff val="40000"/>
+                  </a:schemeClr>
+                </a:solidFill>
+              </a:rPr>
+              <a:t>같은 손</a:t>
+            </a:r>
+            <a:r>
+              <a:rPr lang="en-US" altLang="ko-KR" sz="1000" b="1" dirty="0">
+                <a:solidFill>
+                  <a:schemeClr val="accent6">
+                    <a:lumMod val="60000"/>
+                    <a:lumOff val="40000"/>
+                  </a:schemeClr>
+                </a:solidFill>
+              </a:rPr>
+              <a:t>?</a:t>
+            </a:r>
+            <a:endParaRPr lang="ko-KR" altLang="en-US" sz="1000" b="1" dirty="0">
+              <a:solidFill>
+                <a:schemeClr val="accent6">
+                  <a:lumMod val="60000"/>
+                  <a:lumOff val="40000"/>
+                </a:schemeClr>
+              </a:solidFill>
+            </a:endParaRPr>
+          </a:p>
+        </p:txBody>
+      </p:sp>
+      <p:cxnSp>
+        <p:nvCxnSpPr>
+          <p:cNvPr id="538" name="직선 화살표 연결선 537">
+            <a:extLst>
+              <a:ext uri="{FF2B5EF4-FFF2-40B4-BE49-F238E27FC236}">
+                <a16:creationId xmlns:a16="http://schemas.microsoft.com/office/drawing/2014/main" id="{7F8E3464-A606-D043-E58F-B8346C89E82F}"/>
+              </a:ext>
+            </a:extLst>
+          </p:cNvPr>
+          <p:cNvCxnSpPr>
+            <a:cxnSpLocks/>
+            <a:stCxn id="496" idx="3"/>
+            <a:endCxn id="537" idx="0"/>
+          </p:cNvCxnSpPr>
+          <p:nvPr/>
+        </p:nvCxnSpPr>
+        <p:spPr>
+          <a:xfrm>
+            <a:off x="9298521" y="558140"/>
+            <a:ext cx="895152" cy="588201"/>
+          </a:xfrm>
+          <a:prstGeom prst="bentConnector2">
+            <a:avLst/>
+          </a:prstGeom>
+          <a:ln>
+            <a:tailEnd type="triangle"/>
+          </a:ln>
+        </p:spPr>
+        <p:style>
+          <a:lnRef idx="3">
+            <a:schemeClr val="dk1"/>
+          </a:lnRef>
+          <a:fillRef idx="0">
+            <a:schemeClr val="dk1"/>
+          </a:fillRef>
+          <a:effectRef idx="2">
+            <a:schemeClr val="dk1"/>
+          </a:effectRef>
+          <a:fontRef idx="minor">
+            <a:schemeClr val="tx1"/>
+          </a:fontRef>
+        </p:style>
+      </p:cxnSp>
+      <p:cxnSp>
+        <p:nvCxnSpPr>
+          <p:cNvPr id="541" name="직선 화살표 연결선 540">
+            <a:extLst>
+              <a:ext uri="{FF2B5EF4-FFF2-40B4-BE49-F238E27FC236}">
+                <a16:creationId xmlns:a16="http://schemas.microsoft.com/office/drawing/2014/main" id="{38C68FA7-59BB-1BAF-601F-4B8EABF3A647}"/>
+              </a:ext>
+            </a:extLst>
+          </p:cNvPr>
+          <p:cNvCxnSpPr>
+            <a:cxnSpLocks/>
+            <a:stCxn id="537" idx="2"/>
+            <a:endCxn id="458" idx="0"/>
+          </p:cNvCxnSpPr>
+          <p:nvPr/>
+        </p:nvCxnSpPr>
+        <p:spPr>
+          <a:xfrm rot="16200000" flipH="1">
+            <a:off x="10452320" y="1591198"/>
+            <a:ext cx="310956" cy="828251"/>
+          </a:xfrm>
+          <a:prstGeom prst="bentConnector3">
+            <a:avLst>
+              <a:gd name="adj1" fmla="val 50000"/>
+            </a:avLst>
+          </a:prstGeom>
+          <a:ln>
+            <a:tailEnd type="triangle"/>
+          </a:ln>
+        </p:spPr>
+        <p:style>
+          <a:lnRef idx="3">
+            <a:schemeClr val="accent1"/>
+          </a:lnRef>
+          <a:fillRef idx="0">
+            <a:schemeClr val="accent1"/>
+          </a:fillRef>
+          <a:effectRef idx="2">
+            <a:schemeClr val="accent1"/>
+          </a:effectRef>
+          <a:fontRef idx="minor">
+            <a:schemeClr val="tx1"/>
+          </a:fontRef>
+        </p:style>
+      </p:cxnSp>
+      <p:cxnSp>
+        <p:nvCxnSpPr>
+          <p:cNvPr id="545" name="직선 화살표 연결선 526">
+            <a:extLst>
+              <a:ext uri="{FF2B5EF4-FFF2-40B4-BE49-F238E27FC236}">
+                <a16:creationId xmlns:a16="http://schemas.microsoft.com/office/drawing/2014/main" id="{5BEB7373-9AF1-35B1-8AF0-355DCA65B3A1}"/>
+              </a:ext>
+            </a:extLst>
+          </p:cNvPr>
+          <p:cNvCxnSpPr>
+            <a:cxnSpLocks/>
+            <a:stCxn id="537" idx="1"/>
+            <a:endCxn id="548" idx="0"/>
+          </p:cNvCxnSpPr>
+          <p:nvPr/>
+        </p:nvCxnSpPr>
+        <p:spPr>
+          <a:xfrm rot="10800000" flipV="1">
+            <a:off x="8658137" y="1498093"/>
+            <a:ext cx="498127" cy="572303"/>
+          </a:xfrm>
+          <a:prstGeom prst="bentConnector2">
+            <a:avLst/>
+          </a:prstGeom>
+          <a:ln>
+            <a:solidFill>
+              <a:srgbClr val="FF0000"/>
+            </a:solidFill>
+            <a:tailEnd type="triangle"/>
+          </a:ln>
+        </p:spPr>
+        <p:style>
+          <a:lnRef idx="3">
+            <a:schemeClr val="accent2"/>
+          </a:lnRef>
+          <a:fillRef idx="0">
+            <a:schemeClr val="accent2"/>
+          </a:fillRef>
+          <a:effectRef idx="2">
+            <a:schemeClr val="accent2"/>
+          </a:effectRef>
+          <a:fontRef idx="minor">
+            <a:schemeClr val="tx1"/>
+          </a:fontRef>
+        </p:style>
+      </p:cxnSp>
+      <p:sp>
+        <p:nvSpPr>
+          <p:cNvPr id="548" name="순서도: 판단 547">
+            <a:extLst>
+              <a:ext uri="{FF2B5EF4-FFF2-40B4-BE49-F238E27FC236}">
+                <a16:creationId xmlns:a16="http://schemas.microsoft.com/office/drawing/2014/main" id="{C6FDDAF7-22C1-38D1-F6F3-45A3E42409C7}"/>
+              </a:ext>
+            </a:extLst>
+          </p:cNvPr>
+          <p:cNvSpPr/>
+          <p:nvPr/>
+        </p:nvSpPr>
+        <p:spPr>
+          <a:xfrm>
+            <a:off x="7641304" y="2070397"/>
+            <a:ext cx="2033664" cy="703505"/>
+          </a:xfrm>
+          <a:prstGeom prst="flowChartDecision">
+            <a:avLst/>
+          </a:prstGeom>
+        </p:spPr>
+        <p:style>
+          <a:lnRef idx="2">
+            <a:schemeClr val="accent1">
+              <a:shade val="50000"/>
+            </a:schemeClr>
+          </a:lnRef>
+          <a:fillRef idx="1">
+            <a:schemeClr val="accent1"/>
+          </a:fillRef>
+          <a:effectRef idx="0">
+            <a:schemeClr val="accent1"/>
+          </a:effectRef>
+          <a:fontRef idx="minor">
+            <a:schemeClr val="lt1"/>
+          </a:fontRef>
+        </p:style>
+        <p:txBody>
+          <a:bodyPr rtlCol="0" anchor="ctr"/>
+          <a:lstStyle/>
+          <a:p>
+            <a:pPr algn="ctr"/>
+            <a:r>
+              <a:rPr lang="ko-KR" altLang="en-US" sz="1000" b="1" dirty="0">
+                <a:solidFill>
+                  <a:schemeClr val="accent6">
+                    <a:lumMod val="60000"/>
+                    <a:lumOff val="40000"/>
+                  </a:schemeClr>
+                </a:solidFill>
+              </a:rPr>
+              <a:t>내가 이김</a:t>
+            </a:r>
+            <a:r>
+              <a:rPr lang="en-US" altLang="ko-KR" sz="1000" b="1" dirty="0">
+                <a:solidFill>
+                  <a:schemeClr val="accent6">
+                    <a:lumMod val="60000"/>
+                    <a:lumOff val="40000"/>
+                  </a:schemeClr>
+                </a:solidFill>
+              </a:rPr>
+              <a:t>?</a:t>
+            </a:r>
+            <a:endParaRPr lang="ko-KR" altLang="en-US" sz="1000" b="1" dirty="0">
+              <a:solidFill>
+                <a:schemeClr val="accent6">
+                  <a:lumMod val="60000"/>
+                  <a:lumOff val="40000"/>
+                </a:schemeClr>
+              </a:solidFill>
+            </a:endParaRPr>
+          </a:p>
+        </p:txBody>
+      </p:sp>
+      <p:cxnSp>
+        <p:nvCxnSpPr>
+          <p:cNvPr id="554" name="직선 화살표 연결선 50">
+            <a:extLst>
+              <a:ext uri="{FF2B5EF4-FFF2-40B4-BE49-F238E27FC236}">
+                <a16:creationId xmlns:a16="http://schemas.microsoft.com/office/drawing/2014/main" id="{DE351F97-8855-AF6D-FE35-7E73CF3F1B32}"/>
+              </a:ext>
+            </a:extLst>
+          </p:cNvPr>
+          <p:cNvCxnSpPr>
+            <a:cxnSpLocks/>
+            <a:stCxn id="548" idx="1"/>
+          </p:cNvCxnSpPr>
+          <p:nvPr/>
+        </p:nvCxnSpPr>
+        <p:spPr>
+          <a:xfrm rot="10800000">
+            <a:off x="5599814" y="1514488"/>
+            <a:ext cx="2041490" cy="907663"/>
+          </a:xfrm>
+          <a:prstGeom prst="bentConnector3">
+            <a:avLst>
+              <a:gd name="adj1" fmla="val 17362"/>
+            </a:avLst>
+          </a:prstGeom>
+          <a:ln>
+            <a:tailEnd type="triangle"/>
+          </a:ln>
+        </p:spPr>
+        <p:style>
+          <a:lnRef idx="3">
+            <a:schemeClr val="accent1"/>
+          </a:lnRef>
+          <a:fillRef idx="0">
+            <a:schemeClr val="accent1"/>
+          </a:fillRef>
+          <a:effectRef idx="2">
+            <a:schemeClr val="accent1"/>
+          </a:effectRef>
+          <a:fontRef idx="minor">
+            <a:schemeClr val="tx1"/>
+          </a:fontRef>
+        </p:style>
+      </p:cxnSp>
+      <p:cxnSp>
+        <p:nvCxnSpPr>
+          <p:cNvPr id="558" name="직선 화살표 연결선 526">
+            <a:extLst>
+              <a:ext uri="{FF2B5EF4-FFF2-40B4-BE49-F238E27FC236}">
+                <a16:creationId xmlns:a16="http://schemas.microsoft.com/office/drawing/2014/main" id="{9B685FEC-BE1C-9C3B-C6EF-505D1BA861D0}"/>
+              </a:ext>
+            </a:extLst>
+          </p:cNvPr>
+          <p:cNvCxnSpPr>
+            <a:cxnSpLocks/>
+            <a:stCxn id="548" idx="2"/>
+          </p:cNvCxnSpPr>
+          <p:nvPr/>
+        </p:nvCxnSpPr>
+        <p:spPr>
+          <a:xfrm rot="5400000">
+            <a:off x="6764004" y="1681044"/>
+            <a:ext cx="801274" cy="2986990"/>
+          </a:xfrm>
+          <a:prstGeom prst="bentConnector2">
+            <a:avLst/>
+          </a:prstGeom>
+          <a:ln>
+            <a:solidFill>
+              <a:srgbClr val="FF0000"/>
+            </a:solidFill>
+            <a:tailEnd type="triangle"/>
+          </a:ln>
+        </p:spPr>
+        <p:style>
+          <a:lnRef idx="3">
+            <a:schemeClr val="accent2"/>
+          </a:lnRef>
+          <a:fillRef idx="0">
+            <a:schemeClr val="accent2"/>
+          </a:fillRef>
+          <a:effectRef idx="2">
+            <a:schemeClr val="accent2"/>
+          </a:effectRef>
+          <a:fontRef idx="minor">
+            <a:schemeClr val="tx1"/>
+          </a:fontRef>
+        </p:style>
+      </p:cxnSp>
+      <p:cxnSp>
+        <p:nvCxnSpPr>
+          <p:cNvPr id="328" name="직선 화살표 연결선 327">
+            <a:extLst>
+              <a:ext uri="{FF2B5EF4-FFF2-40B4-BE49-F238E27FC236}">
+                <a16:creationId xmlns:a16="http://schemas.microsoft.com/office/drawing/2014/main" id="{E97C8AEF-A1BE-2ED9-9580-98B657F7B7DE}"/>
+              </a:ext>
+            </a:extLst>
+          </p:cNvPr>
+          <p:cNvCxnSpPr>
+            <a:cxnSpLocks/>
+            <a:stCxn id="458" idx="2"/>
+          </p:cNvCxnSpPr>
+          <p:nvPr/>
+        </p:nvCxnSpPr>
+        <p:spPr>
+          <a:xfrm rot="5400000">
+            <a:off x="8434143" y="3528046"/>
+            <a:ext cx="3449878" cy="1725685"/>
+          </a:xfrm>
+          <a:prstGeom prst="bentConnector3">
+            <a:avLst>
+              <a:gd name="adj1" fmla="val 99723"/>
+            </a:avLst>
+          </a:prstGeom>
+          <a:ln>
+            <a:tailEnd type="triangle"/>
+          </a:ln>
+        </p:spPr>
+        <p:style>
+          <a:lnRef idx="3">
+            <a:schemeClr val="dk1"/>
+          </a:lnRef>
+          <a:fillRef idx="0">
+            <a:schemeClr val="dk1"/>
+          </a:fillRef>
+          <a:effectRef idx="2">
+            <a:schemeClr val="dk1"/>
+          </a:effectRef>
+          <a:fontRef idx="minor">
+            <a:schemeClr val="tx1"/>
+          </a:fontRef>
+        </p:style>
+      </p:cxnSp>
+      <p:cxnSp>
+        <p:nvCxnSpPr>
+          <p:cNvPr id="335" name="직선 화살표 연결선 327">
+            <a:extLst>
+              <a:ext uri="{FF2B5EF4-FFF2-40B4-BE49-F238E27FC236}">
+                <a16:creationId xmlns:a16="http://schemas.microsoft.com/office/drawing/2014/main" id="{1AC720D1-7F16-D601-3C5E-8C688865E495}"/>
+              </a:ext>
+            </a:extLst>
+          </p:cNvPr>
+          <p:cNvCxnSpPr>
+            <a:cxnSpLocks/>
+            <a:stCxn id="412" idx="2"/>
+            <a:endCxn id="463" idx="3"/>
+          </p:cNvCxnSpPr>
+          <p:nvPr/>
+        </p:nvCxnSpPr>
+        <p:spPr>
+          <a:xfrm rot="5400000">
+            <a:off x="6757727" y="3929066"/>
+            <a:ext cx="954276" cy="4122749"/>
+          </a:xfrm>
+          <a:prstGeom prst="bentConnector2">
+            <a:avLst/>
+          </a:prstGeom>
+          <a:ln>
+            <a:tailEnd type="triangle"/>
+          </a:ln>
+        </p:spPr>
+        <p:style>
+          <a:lnRef idx="3">
+            <a:schemeClr val="dk1"/>
+          </a:lnRef>
+          <a:fillRef idx="0">
+            <a:schemeClr val="dk1"/>
+          </a:fillRef>
+          <a:effectRef idx="2">
+            <a:schemeClr val="dk1"/>
+          </a:effectRef>
+          <a:fontRef idx="minor">
+            <a:schemeClr val="tx1"/>
+          </a:fontRef>
+        </p:style>
+      </p:cxnSp>
+      <p:cxnSp>
+        <p:nvCxnSpPr>
+          <p:cNvPr id="340" name="직선 화살표 연결선 339">
+            <a:extLst>
+              <a:ext uri="{FF2B5EF4-FFF2-40B4-BE49-F238E27FC236}">
+                <a16:creationId xmlns:a16="http://schemas.microsoft.com/office/drawing/2014/main" id="{9DF9247E-5EC9-D754-A0F4-2A4C412480F5}"/>
+              </a:ext>
+            </a:extLst>
+          </p:cNvPr>
+          <p:cNvCxnSpPr>
+            <a:cxnSpLocks/>
+            <a:stCxn id="463" idx="1"/>
+            <a:endCxn id="107" idx="3"/>
+          </p:cNvCxnSpPr>
+          <p:nvPr/>
+        </p:nvCxnSpPr>
+        <p:spPr>
+          <a:xfrm flipH="1" flipV="1">
+            <a:off x="2484333" y="6467577"/>
+            <a:ext cx="614337" cy="1"/>
+          </a:xfrm>
+          <a:prstGeom prst="straightConnector1">
+            <a:avLst/>
+          </a:prstGeom>
+          <a:ln>
+            <a:solidFill>
+              <a:srgbClr val="FF0000"/>
+            </a:solidFill>
+            <a:tailEnd type="triangle"/>
+          </a:ln>
+        </p:spPr>
+        <p:style>
+          <a:lnRef idx="3">
+            <a:schemeClr val="accent2"/>
+          </a:lnRef>
+          <a:fillRef idx="0">
+            <a:schemeClr val="accent2"/>
+          </a:fillRef>
+          <a:effectRef idx="2">
+            <a:schemeClr val="accent2"/>
+          </a:effectRef>
+          <a:fontRef idx="minor">
+            <a:schemeClr val="tx1"/>
+          </a:fontRef>
+        </p:style>
+      </p:cxnSp>
+      <p:cxnSp>
+        <p:nvCxnSpPr>
+          <p:cNvPr id="356" name="직선 화살표 연결선 50">
+            <a:extLst>
+              <a:ext uri="{FF2B5EF4-FFF2-40B4-BE49-F238E27FC236}">
+                <a16:creationId xmlns:a16="http://schemas.microsoft.com/office/drawing/2014/main" id="{1813DC77-9853-F945-C350-67798E88B31F}"/>
+              </a:ext>
+            </a:extLst>
+          </p:cNvPr>
+          <p:cNvCxnSpPr>
+            <a:cxnSpLocks/>
+            <a:stCxn id="463" idx="0"/>
+          </p:cNvCxnSpPr>
+          <p:nvPr/>
+        </p:nvCxnSpPr>
+        <p:spPr>
+          <a:xfrm rot="16200000" flipV="1">
+            <a:off x="1040020" y="3019764"/>
+            <a:ext cx="3107678" cy="3084443"/>
+          </a:xfrm>
+          <a:prstGeom prst="bentConnector3">
+            <a:avLst>
+              <a:gd name="adj1" fmla="val 9171"/>
+            </a:avLst>
+          </a:prstGeom>
+          <a:ln>
+            <a:tailEnd type="triangle"/>
+          </a:ln>
+        </p:spPr>
+        <p:style>
+          <a:lnRef idx="3">
+            <a:schemeClr val="accent1"/>
+          </a:lnRef>
+          <a:fillRef idx="0">
+            <a:schemeClr val="accent1"/>
+          </a:fillRef>
+          <a:effectRef idx="2">
+            <a:schemeClr val="accent1"/>
+          </a:effectRef>
+          <a:fontRef idx="minor">
+            <a:schemeClr val="tx1"/>
+          </a:fontRef>
+        </p:style>
+      </p:cxnSp>
     </p:spTree>
     <p:extLst>
       <p:ext uri="{BB962C8B-B14F-4D97-AF65-F5344CB8AC3E}">
